--- a/site-assets/sources/day3/fig-ja-en.pptx
+++ b/site-assets/sources/day3/fig-ja-en.pptx
@@ -2251,7 +2251,9 @@
           <a:bodyPr rtlCol="0" anchor="ctr"/>
           <a:lstStyle/>
           <a:p>
-            <a:pPr algn="ctr"/>
+            <a:pPr algn="ctr">
+              <a:defRPr/>
+            </a:pPr>
             <a:r>
               <a:rPr kumimoji="1" lang="en-US" altLang="ja-JP"/>
               <a:t>procss1 </a:t>
@@ -2580,13 +2582,14 @@
           </a:ln>
         </p:spPr>
         <p:txBody>
-          <a:bodyPr wrap="none" rtlCol="0">
-            <a:spAutoFit/>
-          </a:bodyPr>
-          <a:lstStyle/>
-          <a:p>
-            <a:r>
-              <a:rPr kumimoji="1" lang="ja-JP" altLang="en-US" sz="2400"/>
+          <a:bodyPr wrap="square" rtlCol="0"/>
+          <a:lstStyle/>
+          <a:p>
+            <a:pPr>
+              <a:defRPr sz="2300"/>
+            </a:pPr>
+            <a:r>
+              <a:rPr kumimoji="1" lang="ja-JP" altLang="en-US" sz="2300"/>
               <a:t>Strong scaling</a:t>
             </a:r>
           </a:p>
@@ -2622,13 +2625,14 @@
           </a:ln>
         </p:spPr>
         <p:txBody>
-          <a:bodyPr wrap="none" rtlCol="0">
-            <a:spAutoFit/>
-          </a:bodyPr>
-          <a:lstStyle/>
-          <a:p>
-            <a:r>
-              <a:rPr kumimoji="1" lang="ja-JP" altLang="en-US" sz="2400"/>
+          <a:bodyPr wrap="square" rtlCol="0"/>
+          <a:lstStyle/>
+          <a:p>
+            <a:pPr>
+              <a:defRPr sz="2300"/>
+            </a:pPr>
+            <a:r>
+              <a:rPr kumimoji="1" lang="ja-JP" altLang="en-US" sz="2300"/>
               <a:t>Weak scaling</a:t>
             </a:r>
           </a:p>
@@ -2755,11 +2759,14 @@
           <a:noFill/>
         </p:spPr>
         <p:txBody>
-          <a:bodyPr wrap="none" rtlCol="0">
-            <a:spAutoFit/>
+          <a:bodyPr wrap="square" rtlCol="0">
+            <a:normAutofit/>
           </a:bodyPr>
           <a:lstStyle/>
           <a:p>
+            <a:pPr>
+              <a:defRPr/>
+            </a:pPr>
             <a:r>
               <a:rPr kumimoji="1" lang="ja-JP" altLang="en-US"/>
               <a:t>Keep the total amount of computation fixed, increase parallelism, and reduce execution time</a:t>
@@ -2790,13 +2797,14 @@
           <a:noFill/>
         </p:spPr>
         <p:txBody>
-          <a:bodyPr wrap="none" rtlCol="0">
-            <a:spAutoFit/>
-          </a:bodyPr>
-          <a:lstStyle/>
-          <a:p>
-            <a:r>
-              <a:rPr kumimoji="1" lang="ja-JP" altLang="en-US"/>
+          <a:bodyPr wrap="square" rtlCol="0"/>
+          <a:lstStyle/>
+          <a:p>
+            <a:pPr>
+              <a:defRPr sz="1300"/>
+            </a:pPr>
+            <a:r>
+              <a:rPr kumimoji="1" lang="ja-JP" altLang="en-US" sz="1300"/>
               <a:t>Keep computation per parallel unit fixed, increase parallelism, and increase the total size</a:t>
             </a:r>
           </a:p>
@@ -3158,6 +3166,9 @@
           </a:bodyPr>
           <a:lstStyle/>
           <a:p>
+            <a:pPr>
+              <a:defRPr/>
+            </a:pPr>
             <a:r>
               <a:rPr kumimoji="1" lang="ja-JP" altLang="en-US" sz="1100"/>
               <a:t>Process 1</a:t>
@@ -3194,6 +3205,9 @@
           </a:bodyPr>
           <a:lstStyle/>
           <a:p>
+            <a:pPr>
+              <a:defRPr/>
+            </a:pPr>
             <a:r>
               <a:rPr kumimoji="1" lang="ja-JP" altLang="en-US" sz="1100"/>
               <a:t>Process 2</a:t>
@@ -3230,6 +3244,9 @@
           </a:bodyPr>
           <a:lstStyle/>
           <a:p>
+            <a:pPr>
+              <a:defRPr/>
+            </a:pPr>
             <a:r>
               <a:rPr kumimoji="1" lang="ja-JP" altLang="en-US" sz="1100"/>
               <a:t>Process 3</a:t>
@@ -3266,6 +3283,9 @@
           </a:bodyPr>
           <a:lstStyle/>
           <a:p>
+            <a:pPr>
+              <a:defRPr/>
+            </a:pPr>
             <a:r>
               <a:rPr kumimoji="1" lang="ja-JP" altLang="en-US" sz="1100"/>
               <a:t>Process 4</a:t>
@@ -3302,6 +3322,9 @@
           </a:bodyPr>
           <a:lstStyle/>
           <a:p>
+            <a:pPr>
+              <a:defRPr/>
+            </a:pPr>
             <a:r>
               <a:rPr kumimoji="1" lang="ja-JP" altLang="en-US" sz="1100"/>
               <a:t>Process 1</a:t>
@@ -3338,6 +3361,9 @@
           </a:bodyPr>
           <a:lstStyle/>
           <a:p>
+            <a:pPr>
+              <a:defRPr/>
+            </a:pPr>
             <a:r>
               <a:rPr kumimoji="1" lang="ja-JP" altLang="en-US" sz="1100"/>
               <a:t>Process 2</a:t>
@@ -3374,6 +3400,9 @@
           </a:bodyPr>
           <a:lstStyle/>
           <a:p>
+            <a:pPr>
+              <a:defRPr/>
+            </a:pPr>
             <a:r>
               <a:rPr kumimoji="1" lang="ja-JP" altLang="en-US" sz="1100"/>
               <a:t>Process 3</a:t>
@@ -3410,6 +3439,9 @@
           </a:bodyPr>
           <a:lstStyle/>
           <a:p>
+            <a:pPr>
+              <a:defRPr/>
+            </a:pPr>
             <a:r>
               <a:rPr kumimoji="1" lang="ja-JP" altLang="en-US" sz="1100"/>
               <a:t>Process 4</a:t>

--- a/site-assets/sources/day3/fig-ja-en.pptx
+++ b/site-assets/sources/day3/fig-ja-en.pptx
@@ -5,11 +5,11 @@
     <p:sldMasterId id="2147483660" r:id="rId1"/>
   </p:sldMasterIdLst>
   <p:notesMasterIdLst>
-    <p:notesMasterId r:id="rId3"/>
+    <p:notesMasterId r:id="rId4"/>
   </p:notesMasterIdLst>
   <p:sldIdLst>
     <p:sldId id="256" r:id="rId2"/>
-    <p:sldId id="257" r:id="rId8"/>
+    <p:sldId id="257" r:id="rId3"/>
   </p:sldIdLst>
   <p:sldSz cx="9906000" cy="6858000" type="A4"/>
   <p:notesSz cx="6858000" cy="9144000"/>
@@ -200,7 +200,7 @@
           </a:lstStyle>
           <a:p>
             <a:fld id="{234B1B89-6D29-7849-8E65-921CEBC6CA4C}" type="datetimeFigureOut">
-              <a:t>2018/10/16</a:t>
+              <a:t>2026/8/7</a:t>
             </a:fld>
             <a:endParaRPr kumimoji="1" lang="ja-JP" altLang="en-US"/>
           </a:p>
@@ -938,296 +938,6 @@
           </a:p>
         </p:txBody>
       </p:sp>
-      <p:pic>
-        <p:nvPicPr>
-          <p:cNvPr id="2" name="図 1">
-            <a:extLst>
-              <a:ext uri="{FF2B5EF4-FFF2-40B4-BE49-F238E27FC236}">
-                <a16:creationId xmlns:a16="http://schemas.microsoft.com/office/drawing/2014/main" id="{AB393E77-B79F-F249-811A-378CCB7116A4}"/>
-              </a:ext>
-            </a:extLst>
-          </p:cNvPr>
-          <p:cNvPicPr>
-            <a:picLocks noChangeAspect="1"/>
-          </p:cNvPicPr>
-          <p:nvPr/>
-        </p:nvPicPr>
-        <p:blipFill>
-          <a:blip r:embed="rId2"/>
-          <a:stretch>
-            <a:fillRect/>
-          </a:stretch>
-        </p:blipFill>
-        <p:spPr>
-          <a:xfrm>
-            <a:off x="2563668" y="4221018"/>
-            <a:ext cx="1148086" cy="2134870"/>
-          </a:xfrm>
-          <a:prstGeom prst="rect">
-            <a:avLst/>
-          </a:prstGeom>
-        </p:spPr>
-      </p:pic>
-      <p:pic>
-        <p:nvPicPr>
-          <p:cNvPr id="3" name="図 2">
-            <a:extLst>
-              <a:ext uri="{FF2B5EF4-FFF2-40B4-BE49-F238E27FC236}">
-                <a16:creationId xmlns:a16="http://schemas.microsoft.com/office/drawing/2014/main" id="{0D25D743-5E95-784E-B686-9A55F8BDE33F}"/>
-              </a:ext>
-            </a:extLst>
-          </p:cNvPr>
-          <p:cNvPicPr>
-            <a:picLocks noChangeAspect="1"/>
-          </p:cNvPicPr>
-          <p:nvPr/>
-        </p:nvPicPr>
-        <p:blipFill>
-          <a:blip r:embed="rId3"/>
-          <a:stretch>
-            <a:fillRect/>
-          </a:stretch>
-        </p:blipFill>
-        <p:spPr>
-          <a:xfrm>
-            <a:off x="2033503" y="1076038"/>
-            <a:ext cx="2134870" cy="2134870"/>
-          </a:xfrm>
-          <a:prstGeom prst="rect">
-            <a:avLst/>
-          </a:prstGeom>
-        </p:spPr>
-      </p:pic>
-      <p:sp>
-        <p:nvSpPr>
-          <p:cNvPr id="4" name="正方形/長方形 3">
-            <a:extLst>
-              <a:ext uri="{FF2B5EF4-FFF2-40B4-BE49-F238E27FC236}">
-                <a16:creationId xmlns:a16="http://schemas.microsoft.com/office/drawing/2014/main" id="{88E00B42-1821-9448-80E0-53138E038651}"/>
-              </a:ext>
-            </a:extLst>
-          </p:cNvPr>
-          <p:cNvSpPr/>
-          <p:nvPr/>
-        </p:nvSpPr>
-        <p:spPr>
-          <a:xfrm>
-            <a:off x="339900" y="1163782"/>
-            <a:ext cx="942106" cy="1884212"/>
-          </a:xfrm>
-          <a:prstGeom prst="rect">
-            <a:avLst/>
-          </a:prstGeom>
-        </p:spPr>
-        <p:style>
-          <a:lnRef idx="2">
-            <a:schemeClr val="accent1">
-              <a:shade val="50000"/>
-            </a:schemeClr>
-          </a:lnRef>
-          <a:fillRef idx="1">
-            <a:schemeClr val="accent1"/>
-          </a:fillRef>
-          <a:effectRef idx="0">
-            <a:schemeClr val="accent1"/>
-          </a:effectRef>
-          <a:fontRef idx="minor">
-            <a:schemeClr val="lt1"/>
-          </a:fontRef>
-        </p:style>
-        <p:txBody>
-          <a:bodyPr rtlCol="0" anchor="ctr"/>
-          <a:lstStyle/>
-          <a:p>
-            <a:pPr algn="ctr"/>
-            <a:endParaRPr kumimoji="1" lang="ja-JP" altLang="en-US"/>
-          </a:p>
-        </p:txBody>
-      </p:sp>
-      <p:sp>
-        <p:nvSpPr>
-          <p:cNvPr id="5" name="正方形/長方形 4">
-            <a:extLst>
-              <a:ext uri="{FF2B5EF4-FFF2-40B4-BE49-F238E27FC236}">
-                <a16:creationId xmlns:a16="http://schemas.microsoft.com/office/drawing/2014/main" id="{D5DCAE97-CB96-8E42-944F-DF15887407A2}"/>
-              </a:ext>
-            </a:extLst>
-          </p:cNvPr>
-          <p:cNvSpPr/>
-          <p:nvPr/>
-        </p:nvSpPr>
-        <p:spPr>
-          <a:xfrm>
-            <a:off x="4918364" y="2479964"/>
-            <a:ext cx="942106" cy="471053"/>
-          </a:xfrm>
-          <a:prstGeom prst="rect">
-            <a:avLst/>
-          </a:prstGeom>
-        </p:spPr>
-        <p:style>
-          <a:lnRef idx="2">
-            <a:schemeClr val="accent1">
-              <a:shade val="50000"/>
-            </a:schemeClr>
-          </a:lnRef>
-          <a:fillRef idx="1">
-            <a:schemeClr val="accent1"/>
-          </a:fillRef>
-          <a:effectRef idx="0">
-            <a:schemeClr val="accent1"/>
-          </a:effectRef>
-          <a:fontRef idx="minor">
-            <a:schemeClr val="lt1"/>
-          </a:fontRef>
-        </p:style>
-        <p:txBody>
-          <a:bodyPr rtlCol="0" anchor="ctr"/>
-          <a:lstStyle/>
-          <a:p>
-            <a:pPr algn="ctr"/>
-            <a:endParaRPr kumimoji="1" lang="ja-JP" altLang="en-US"/>
-          </a:p>
-        </p:txBody>
-      </p:sp>
-      <p:sp>
-        <p:nvSpPr>
-          <p:cNvPr id="6" name="正方形/長方形 5">
-            <a:extLst>
-              <a:ext uri="{FF2B5EF4-FFF2-40B4-BE49-F238E27FC236}">
-                <a16:creationId xmlns:a16="http://schemas.microsoft.com/office/drawing/2014/main" id="{A3F4E5B1-7B58-4E4F-9515-2102D51E45F7}"/>
-              </a:ext>
-            </a:extLst>
-          </p:cNvPr>
-          <p:cNvSpPr/>
-          <p:nvPr/>
-        </p:nvSpPr>
-        <p:spPr>
-          <a:xfrm>
-            <a:off x="6026728" y="2479964"/>
-            <a:ext cx="942106" cy="471053"/>
-          </a:xfrm>
-          <a:prstGeom prst="rect">
-            <a:avLst/>
-          </a:prstGeom>
-        </p:spPr>
-        <p:style>
-          <a:lnRef idx="2">
-            <a:schemeClr val="accent1">
-              <a:shade val="50000"/>
-            </a:schemeClr>
-          </a:lnRef>
-          <a:fillRef idx="1">
-            <a:schemeClr val="accent1"/>
-          </a:fillRef>
-          <a:effectRef idx="0">
-            <a:schemeClr val="accent1"/>
-          </a:effectRef>
-          <a:fontRef idx="minor">
-            <a:schemeClr val="lt1"/>
-          </a:fontRef>
-        </p:style>
-        <p:txBody>
-          <a:bodyPr rtlCol="0" anchor="ctr"/>
-          <a:lstStyle/>
-          <a:p>
-            <a:pPr algn="ctr"/>
-            <a:endParaRPr kumimoji="1" lang="ja-JP" altLang="en-US"/>
-          </a:p>
-        </p:txBody>
-      </p:sp>
-      <p:sp>
-        <p:nvSpPr>
-          <p:cNvPr id="7" name="正方形/長方形 6">
-            <a:extLst>
-              <a:ext uri="{FF2B5EF4-FFF2-40B4-BE49-F238E27FC236}">
-                <a16:creationId xmlns:a16="http://schemas.microsoft.com/office/drawing/2014/main" id="{5071F583-E1BE-D448-AE44-180180A16B5B}"/>
-              </a:ext>
-            </a:extLst>
-          </p:cNvPr>
-          <p:cNvSpPr/>
-          <p:nvPr/>
-        </p:nvSpPr>
-        <p:spPr>
-          <a:xfrm>
-            <a:off x="7135092" y="2479964"/>
-            <a:ext cx="942106" cy="471053"/>
-          </a:xfrm>
-          <a:prstGeom prst="rect">
-            <a:avLst/>
-          </a:prstGeom>
-        </p:spPr>
-        <p:style>
-          <a:lnRef idx="2">
-            <a:schemeClr val="accent1">
-              <a:shade val="50000"/>
-            </a:schemeClr>
-          </a:lnRef>
-          <a:fillRef idx="1">
-            <a:schemeClr val="accent1"/>
-          </a:fillRef>
-          <a:effectRef idx="0">
-            <a:schemeClr val="accent1"/>
-          </a:effectRef>
-          <a:fontRef idx="minor">
-            <a:schemeClr val="lt1"/>
-          </a:fontRef>
-        </p:style>
-        <p:txBody>
-          <a:bodyPr rtlCol="0" anchor="ctr"/>
-          <a:lstStyle/>
-          <a:p>
-            <a:pPr algn="ctr"/>
-            <a:endParaRPr kumimoji="1" lang="ja-JP" altLang="en-US"/>
-          </a:p>
-        </p:txBody>
-      </p:sp>
-      <p:sp>
-        <p:nvSpPr>
-          <p:cNvPr id="8" name="正方形/長方形 7">
-            <a:extLst>
-              <a:ext uri="{FF2B5EF4-FFF2-40B4-BE49-F238E27FC236}">
-                <a16:creationId xmlns:a16="http://schemas.microsoft.com/office/drawing/2014/main" id="{F5CEF7FC-65F1-A34D-B7B8-8B693DA1585A}"/>
-              </a:ext>
-            </a:extLst>
-          </p:cNvPr>
-          <p:cNvSpPr/>
-          <p:nvPr/>
-        </p:nvSpPr>
-        <p:spPr>
-          <a:xfrm>
-            <a:off x="8243456" y="2479964"/>
-            <a:ext cx="942106" cy="471053"/>
-          </a:xfrm>
-          <a:prstGeom prst="rect">
-            <a:avLst/>
-          </a:prstGeom>
-        </p:spPr>
-        <p:style>
-          <a:lnRef idx="2">
-            <a:schemeClr val="accent1">
-              <a:shade val="50000"/>
-            </a:schemeClr>
-          </a:lnRef>
-          <a:fillRef idx="1">
-            <a:schemeClr val="accent1"/>
-          </a:fillRef>
-          <a:effectRef idx="0">
-            <a:schemeClr val="accent1"/>
-          </a:effectRef>
-          <a:fontRef idx="minor">
-            <a:schemeClr val="lt1"/>
-          </a:fontRef>
-        </p:style>
-        <p:txBody>
-          <a:bodyPr rtlCol="0" anchor="ctr"/>
-          <a:lstStyle/>
-          <a:p>
-            <a:pPr algn="ctr"/>
-            <a:endParaRPr kumimoji="1" lang="ja-JP" altLang="en-US"/>
-          </a:p>
-        </p:txBody>
-      </p:sp>
       <p:sp>
         <p:nvSpPr>
           <p:cNvPr id="9" name="テキスト ボックス 8">
@@ -1314,104 +1024,6 @@
       </p:sp>
       <p:sp>
         <p:nvSpPr>
-          <p:cNvPr id="11" name="右矢印 10">
-            <a:extLst>
-              <a:ext uri="{FF2B5EF4-FFF2-40B4-BE49-F238E27FC236}">
-                <a16:creationId xmlns:a16="http://schemas.microsoft.com/office/drawing/2014/main" id="{69629DBD-888F-ED41-B876-758AC22BCC52}"/>
-              </a:ext>
-            </a:extLst>
-          </p:cNvPr>
-          <p:cNvSpPr/>
-          <p:nvPr/>
-        </p:nvSpPr>
-        <p:spPr>
-          <a:xfrm>
-            <a:off x="1565564" y="1787236"/>
-            <a:ext cx="554181" cy="554182"/>
-          </a:xfrm>
-          <a:prstGeom prst="rightArrow">
-            <a:avLst/>
-          </a:prstGeom>
-          <a:solidFill>
-            <a:srgbClr val="FF0000"/>
-          </a:solidFill>
-        </p:spPr>
-        <p:style>
-          <a:lnRef idx="2">
-            <a:schemeClr val="accent1">
-              <a:shade val="50000"/>
-            </a:schemeClr>
-          </a:lnRef>
-          <a:fillRef idx="1">
-            <a:schemeClr val="accent1"/>
-          </a:fillRef>
-          <a:effectRef idx="0">
-            <a:schemeClr val="accent1"/>
-          </a:effectRef>
-          <a:fontRef idx="minor">
-            <a:schemeClr val="lt1"/>
-          </a:fontRef>
-        </p:style>
-        <p:txBody>
-          <a:bodyPr rtlCol="0" anchor="ctr"/>
-          <a:lstStyle/>
-          <a:p>
-            <a:pPr algn="ctr"/>
-            <a:endParaRPr kumimoji="1" lang="ja-JP" altLang="en-US"/>
-          </a:p>
-        </p:txBody>
-      </p:sp>
-      <p:sp>
-        <p:nvSpPr>
-          <p:cNvPr id="12" name="右矢印 11">
-            <a:extLst>
-              <a:ext uri="{FF2B5EF4-FFF2-40B4-BE49-F238E27FC236}">
-                <a16:creationId xmlns:a16="http://schemas.microsoft.com/office/drawing/2014/main" id="{7830C8E8-2D7D-CB4C-9F8E-A961292975AC}"/>
-              </a:ext>
-            </a:extLst>
-          </p:cNvPr>
-          <p:cNvSpPr/>
-          <p:nvPr/>
-        </p:nvSpPr>
-        <p:spPr>
-          <a:xfrm>
-            <a:off x="4170218" y="1759527"/>
-            <a:ext cx="554181" cy="554182"/>
-          </a:xfrm>
-          <a:prstGeom prst="rightArrow">
-            <a:avLst/>
-          </a:prstGeom>
-          <a:solidFill>
-            <a:srgbClr val="FF0000"/>
-          </a:solidFill>
-        </p:spPr>
-        <p:style>
-          <a:lnRef idx="2">
-            <a:schemeClr val="accent1">
-              <a:shade val="50000"/>
-            </a:schemeClr>
-          </a:lnRef>
-          <a:fillRef idx="1">
-            <a:schemeClr val="accent1"/>
-          </a:fillRef>
-          <a:effectRef idx="0">
-            <a:schemeClr val="accent1"/>
-          </a:effectRef>
-          <a:fontRef idx="minor">
-            <a:schemeClr val="lt1"/>
-          </a:fontRef>
-        </p:style>
-        <p:txBody>
-          <a:bodyPr rtlCol="0" anchor="ctr"/>
-          <a:lstStyle/>
-          <a:p>
-            <a:pPr algn="ctr"/>
-            <a:endParaRPr kumimoji="1" lang="ja-JP" altLang="en-US"/>
-          </a:p>
-        </p:txBody>
-      </p:sp>
-      <p:sp>
-        <p:nvSpPr>
           <p:cNvPr id="13" name="テキスト ボックス 12">
             <a:extLst>
               <a:ext uri="{FF2B5EF4-FFF2-40B4-BE49-F238E27FC236}">
@@ -1480,340 +1092,916 @@
           </a:p>
         </p:txBody>
       </p:sp>
-      <p:sp>
-        <p:nvSpPr>
-          <p:cNvPr id="15" name="正方形/長方形 14">
+      <p:grpSp>
+        <p:nvGrpSpPr>
+          <p:cNvPr id="32" name="グループ化 31">
             <a:extLst>
               <a:ext uri="{FF2B5EF4-FFF2-40B4-BE49-F238E27FC236}">
-                <a16:creationId xmlns:a16="http://schemas.microsoft.com/office/drawing/2014/main" id="{EEFAB6BD-2BE3-2E49-A650-7B9C667EED7D}"/>
+                <a16:creationId xmlns:a16="http://schemas.microsoft.com/office/drawing/2014/main" id="{BC5F47F0-BD02-ACF4-72B1-81465D8FAAA2}"/>
               </a:ext>
             </a:extLst>
           </p:cNvPr>
-          <p:cNvSpPr/>
+          <p:cNvGrpSpPr/>
           <p:nvPr/>
-        </p:nvSpPr>
-        <p:spPr>
+        </p:nvGrpSpPr>
+        <p:grpSpPr>
           <a:xfrm>
-            <a:off x="339900" y="4281055"/>
-            <a:ext cx="942106" cy="1884212"/>
+            <a:off x="2358099" y="1505188"/>
+            <a:ext cx="5179252" cy="1640088"/>
+            <a:chOff x="2809188" y="1211466"/>
+            <a:chExt cx="6385122" cy="2021944"/>
           </a:xfrm>
-          <a:prstGeom prst="rect">
-            <a:avLst/>
-          </a:prstGeom>
-        </p:spPr>
-        <p:style>
-          <a:lnRef idx="2">
-            <a:schemeClr val="accent1">
-              <a:shade val="50000"/>
-            </a:schemeClr>
-          </a:lnRef>
-          <a:fillRef idx="1">
-            <a:schemeClr val="accent1"/>
-          </a:fillRef>
-          <a:effectRef idx="0">
-            <a:schemeClr val="accent1"/>
-          </a:effectRef>
-          <a:fontRef idx="minor">
-            <a:schemeClr val="lt1"/>
-          </a:fontRef>
-        </p:style>
-        <p:txBody>
-          <a:bodyPr rtlCol="0" anchor="ctr"/>
-          <a:lstStyle/>
-          <a:p>
-            <a:pPr algn="ctr"/>
-            <a:endParaRPr kumimoji="1" lang="ja-JP" altLang="en-US"/>
-          </a:p>
-        </p:txBody>
-      </p:sp>
-      <p:sp>
-        <p:nvSpPr>
-          <p:cNvPr id="16" name="右矢印 15">
+        </p:grpSpPr>
+        <p:sp>
+          <p:nvSpPr>
+            <p:cNvPr id="33" name="正方形/長方形 32">
+              <a:extLst>
+                <a:ext uri="{FF2B5EF4-FFF2-40B4-BE49-F238E27FC236}">
+                  <a16:creationId xmlns:a16="http://schemas.microsoft.com/office/drawing/2014/main" id="{893C3AFA-5D72-923E-63EA-83C4DF965433}"/>
+                </a:ext>
+              </a:extLst>
+            </p:cNvPr>
+            <p:cNvSpPr/>
+            <p:nvPr/>
+          </p:nvSpPr>
+          <p:spPr>
+            <a:xfrm>
+              <a:off x="2809188" y="1211466"/>
+              <a:ext cx="942106" cy="1884212"/>
+            </a:xfrm>
+            <a:prstGeom prst="rect">
+              <a:avLst/>
+            </a:prstGeom>
+          </p:spPr>
+          <p:style>
+            <a:lnRef idx="2">
+              <a:schemeClr val="accent1">
+                <a:shade val="50000"/>
+              </a:schemeClr>
+            </a:lnRef>
+            <a:fillRef idx="1">
+              <a:schemeClr val="accent1"/>
+            </a:fillRef>
+            <a:effectRef idx="0">
+              <a:schemeClr val="accent1"/>
+            </a:effectRef>
+            <a:fontRef idx="minor">
+              <a:schemeClr val="lt1"/>
+            </a:fontRef>
+          </p:style>
+          <p:txBody>
+            <a:bodyPr rtlCol="0" anchor="ctr"/>
+            <a:lstStyle/>
+            <a:p>
+              <a:pPr algn="ctr"/>
+              <a:endParaRPr kumimoji="1" lang="ja-JP" altLang="en-US"/>
+            </a:p>
+          </p:txBody>
+        </p:sp>
+        <p:sp>
+          <p:nvSpPr>
+            <p:cNvPr id="34" name="正方形/長方形 33">
+              <a:extLst>
+                <a:ext uri="{FF2B5EF4-FFF2-40B4-BE49-F238E27FC236}">
+                  <a16:creationId xmlns:a16="http://schemas.microsoft.com/office/drawing/2014/main" id="{EED40B39-5370-663C-1545-E29A7CA21510}"/>
+                </a:ext>
+              </a:extLst>
+            </p:cNvPr>
+            <p:cNvSpPr/>
+            <p:nvPr/>
+          </p:nvSpPr>
+          <p:spPr>
+            <a:xfrm>
+              <a:off x="4918364" y="2479964"/>
+              <a:ext cx="942106" cy="471053"/>
+            </a:xfrm>
+            <a:prstGeom prst="rect">
+              <a:avLst/>
+            </a:prstGeom>
+          </p:spPr>
+          <p:style>
+            <a:lnRef idx="2">
+              <a:schemeClr val="accent1">
+                <a:shade val="50000"/>
+              </a:schemeClr>
+            </a:lnRef>
+            <a:fillRef idx="1">
+              <a:schemeClr val="accent1"/>
+            </a:fillRef>
+            <a:effectRef idx="0">
+              <a:schemeClr val="accent1"/>
+            </a:effectRef>
+            <a:fontRef idx="minor">
+              <a:schemeClr val="lt1"/>
+            </a:fontRef>
+          </p:style>
+          <p:txBody>
+            <a:bodyPr rtlCol="0" anchor="ctr"/>
+            <a:lstStyle/>
+            <a:p>
+              <a:pPr algn="ctr"/>
+              <a:endParaRPr kumimoji="1" lang="ja-JP" altLang="en-US"/>
+            </a:p>
+          </p:txBody>
+        </p:sp>
+        <p:sp>
+          <p:nvSpPr>
+            <p:cNvPr id="35" name="正方形/長方形 34">
+              <a:extLst>
+                <a:ext uri="{FF2B5EF4-FFF2-40B4-BE49-F238E27FC236}">
+                  <a16:creationId xmlns:a16="http://schemas.microsoft.com/office/drawing/2014/main" id="{1C6429B5-F3FF-3D17-219D-98CB152D7B33}"/>
+                </a:ext>
+              </a:extLst>
+            </p:cNvPr>
+            <p:cNvSpPr/>
+            <p:nvPr/>
+          </p:nvSpPr>
+          <p:spPr>
+            <a:xfrm>
+              <a:off x="6035476" y="2479964"/>
+              <a:ext cx="942106" cy="471053"/>
+            </a:xfrm>
+            <a:prstGeom prst="rect">
+              <a:avLst/>
+            </a:prstGeom>
+          </p:spPr>
+          <p:style>
+            <a:lnRef idx="2">
+              <a:schemeClr val="accent1">
+                <a:shade val="50000"/>
+              </a:schemeClr>
+            </a:lnRef>
+            <a:fillRef idx="1">
+              <a:schemeClr val="accent1"/>
+            </a:fillRef>
+            <a:effectRef idx="0">
+              <a:schemeClr val="accent1"/>
+            </a:effectRef>
+            <a:fontRef idx="minor">
+              <a:schemeClr val="lt1"/>
+            </a:fontRef>
+          </p:style>
+          <p:txBody>
+            <a:bodyPr rtlCol="0" anchor="ctr"/>
+            <a:lstStyle/>
+            <a:p>
+              <a:pPr algn="ctr"/>
+              <a:endParaRPr kumimoji="1" lang="ja-JP" altLang="en-US"/>
+            </a:p>
+          </p:txBody>
+        </p:sp>
+        <p:sp>
+          <p:nvSpPr>
+            <p:cNvPr id="36" name="正方形/長方形 35">
+              <a:extLst>
+                <a:ext uri="{FF2B5EF4-FFF2-40B4-BE49-F238E27FC236}">
+                  <a16:creationId xmlns:a16="http://schemas.microsoft.com/office/drawing/2014/main" id="{FF873F7E-0627-8353-F33D-98B471639E98}"/>
+                </a:ext>
+              </a:extLst>
+            </p:cNvPr>
+            <p:cNvSpPr/>
+            <p:nvPr/>
+          </p:nvSpPr>
+          <p:spPr>
+            <a:xfrm>
+              <a:off x="7135092" y="2479964"/>
+              <a:ext cx="942106" cy="471053"/>
+            </a:xfrm>
+            <a:prstGeom prst="rect">
+              <a:avLst/>
+            </a:prstGeom>
+          </p:spPr>
+          <p:style>
+            <a:lnRef idx="2">
+              <a:schemeClr val="accent1">
+                <a:shade val="50000"/>
+              </a:schemeClr>
+            </a:lnRef>
+            <a:fillRef idx="1">
+              <a:schemeClr val="accent1"/>
+            </a:fillRef>
+            <a:effectRef idx="0">
+              <a:schemeClr val="accent1"/>
+            </a:effectRef>
+            <a:fontRef idx="minor">
+              <a:schemeClr val="lt1"/>
+            </a:fontRef>
+          </p:style>
+          <p:txBody>
+            <a:bodyPr rtlCol="0" anchor="ctr"/>
+            <a:lstStyle/>
+            <a:p>
+              <a:pPr algn="ctr"/>
+              <a:endParaRPr kumimoji="1" lang="ja-JP" altLang="en-US"/>
+            </a:p>
+          </p:txBody>
+        </p:sp>
+        <p:sp>
+          <p:nvSpPr>
+            <p:cNvPr id="37" name="正方形/長方形 36">
+              <a:extLst>
+                <a:ext uri="{FF2B5EF4-FFF2-40B4-BE49-F238E27FC236}">
+                  <a16:creationId xmlns:a16="http://schemas.microsoft.com/office/drawing/2014/main" id="{413FEABD-1EE7-8A62-7F08-CA05CD6F8AC4}"/>
+                </a:ext>
+              </a:extLst>
+            </p:cNvPr>
+            <p:cNvSpPr/>
+            <p:nvPr/>
+          </p:nvSpPr>
+          <p:spPr>
+            <a:xfrm>
+              <a:off x="8252204" y="2479964"/>
+              <a:ext cx="942106" cy="471053"/>
+            </a:xfrm>
+            <a:prstGeom prst="rect">
+              <a:avLst/>
+            </a:prstGeom>
+          </p:spPr>
+          <p:style>
+            <a:lnRef idx="2">
+              <a:schemeClr val="accent1">
+                <a:shade val="50000"/>
+              </a:schemeClr>
+            </a:lnRef>
+            <a:fillRef idx="1">
+              <a:schemeClr val="accent1"/>
+            </a:fillRef>
+            <a:effectRef idx="0">
+              <a:schemeClr val="accent1"/>
+            </a:effectRef>
+            <a:fontRef idx="minor">
+              <a:schemeClr val="lt1"/>
+            </a:fontRef>
+          </p:style>
+          <p:txBody>
+            <a:bodyPr rtlCol="0" anchor="ctr"/>
+            <a:lstStyle/>
+            <a:p>
+              <a:pPr algn="ctr"/>
+              <a:endParaRPr kumimoji="1" lang="ja-JP" altLang="en-US"/>
+            </a:p>
+          </p:txBody>
+        </p:sp>
+        <p:sp>
+          <p:nvSpPr>
+            <p:cNvPr id="38" name="右矢印 37">
+              <a:extLst>
+                <a:ext uri="{FF2B5EF4-FFF2-40B4-BE49-F238E27FC236}">
+                  <a16:creationId xmlns:a16="http://schemas.microsoft.com/office/drawing/2014/main" id="{8F6D5ABF-17BB-FEE6-9E0E-6D4C794FEC12}"/>
+                </a:ext>
+              </a:extLst>
+            </p:cNvPr>
+            <p:cNvSpPr/>
+            <p:nvPr/>
+          </p:nvSpPr>
+          <p:spPr>
+            <a:xfrm>
+              <a:off x="4170218" y="1759527"/>
+              <a:ext cx="554181" cy="554182"/>
+            </a:xfrm>
+            <a:prstGeom prst="rightArrow">
+              <a:avLst/>
+            </a:prstGeom>
+            <a:solidFill>
+              <a:srgbClr val="FF0000"/>
+            </a:solidFill>
+          </p:spPr>
+          <p:style>
+            <a:lnRef idx="2">
+              <a:schemeClr val="accent1">
+                <a:shade val="50000"/>
+              </a:schemeClr>
+            </a:lnRef>
+            <a:fillRef idx="1">
+              <a:schemeClr val="accent1"/>
+            </a:fillRef>
+            <a:effectRef idx="0">
+              <a:schemeClr val="accent1"/>
+            </a:effectRef>
+            <a:fontRef idx="minor">
+              <a:schemeClr val="lt1"/>
+            </a:fontRef>
+          </p:style>
+          <p:txBody>
+            <a:bodyPr rtlCol="0" anchor="ctr"/>
+            <a:lstStyle/>
+            <a:p>
+              <a:pPr algn="ctr"/>
+              <a:endParaRPr kumimoji="1" lang="ja-JP" altLang="en-US"/>
+            </a:p>
+          </p:txBody>
+        </p:sp>
+        <p:sp>
+          <p:nvSpPr>
+            <p:cNvPr id="39" name="テキスト ボックス 38">
+              <a:extLst>
+                <a:ext uri="{FF2B5EF4-FFF2-40B4-BE49-F238E27FC236}">
+                  <a16:creationId xmlns:a16="http://schemas.microsoft.com/office/drawing/2014/main" id="{09DBDFEC-5D9F-719B-CD01-BD02FF8C0364}"/>
+                </a:ext>
+              </a:extLst>
+            </p:cNvPr>
+            <p:cNvSpPr txBox="1"/>
+            <p:nvPr/>
+          </p:nvSpPr>
+          <p:spPr>
+            <a:xfrm>
+              <a:off x="4978888" y="2971800"/>
+              <a:ext cx="821059" cy="261610"/>
+            </a:xfrm>
+            <a:prstGeom prst="rect">
+              <a:avLst/>
+            </a:prstGeom>
+            <a:noFill/>
+          </p:spPr>
+          <p:txBody>
+            <a:bodyPr wrap="none" rtlCol="0">
+              <a:spAutoFit/>
+            </a:bodyPr>
+            <a:lstStyle/>
+            <a:p>
+              <a:pPr>
+                <a:defRPr/>
+              </a:pPr>
+              <a:r>
+                <a:rPr kumimoji="1" lang="ja-JP" altLang="en-US" sz="1100"/>
+                <a:t>Process 1</a:t>
+              </a:r>
+            </a:p>
+          </p:txBody>
+        </p:sp>
+        <p:sp>
+          <p:nvSpPr>
+            <p:cNvPr id="40" name="テキスト ボックス 39">
+              <a:extLst>
+                <a:ext uri="{FF2B5EF4-FFF2-40B4-BE49-F238E27FC236}">
+                  <a16:creationId xmlns:a16="http://schemas.microsoft.com/office/drawing/2014/main" id="{A7200A03-837D-9A0F-F230-1127F3A600BB}"/>
+                </a:ext>
+              </a:extLst>
+            </p:cNvPr>
+            <p:cNvSpPr txBox="1"/>
+            <p:nvPr/>
+          </p:nvSpPr>
+          <p:spPr>
+            <a:xfrm>
+              <a:off x="6096000" y="2971800"/>
+              <a:ext cx="821059" cy="261610"/>
+            </a:xfrm>
+            <a:prstGeom prst="rect">
+              <a:avLst/>
+            </a:prstGeom>
+            <a:noFill/>
+          </p:spPr>
+          <p:txBody>
+            <a:bodyPr wrap="none" rtlCol="0">
+              <a:spAutoFit/>
+            </a:bodyPr>
+            <a:lstStyle/>
+            <a:p>
+              <a:pPr>
+                <a:defRPr/>
+              </a:pPr>
+              <a:r>
+                <a:rPr kumimoji="1" lang="ja-JP" altLang="en-US" sz="1100"/>
+                <a:t>Process 2</a:t>
+              </a:r>
+            </a:p>
+          </p:txBody>
+        </p:sp>
+        <p:sp>
+          <p:nvSpPr>
+            <p:cNvPr id="41" name="テキスト ボックス 40">
+              <a:extLst>
+                <a:ext uri="{FF2B5EF4-FFF2-40B4-BE49-F238E27FC236}">
+                  <a16:creationId xmlns:a16="http://schemas.microsoft.com/office/drawing/2014/main" id="{2BD27615-1908-7028-F4E8-73AC7216180F}"/>
+                </a:ext>
+              </a:extLst>
+            </p:cNvPr>
+            <p:cNvSpPr txBox="1"/>
+            <p:nvPr/>
+          </p:nvSpPr>
+          <p:spPr>
+            <a:xfrm>
+              <a:off x="7195616" y="2971800"/>
+              <a:ext cx="821059" cy="261610"/>
+            </a:xfrm>
+            <a:prstGeom prst="rect">
+              <a:avLst/>
+            </a:prstGeom>
+            <a:noFill/>
+          </p:spPr>
+          <p:txBody>
+            <a:bodyPr wrap="none" rtlCol="0">
+              <a:spAutoFit/>
+            </a:bodyPr>
+            <a:lstStyle/>
+            <a:p>
+              <a:pPr>
+                <a:defRPr/>
+              </a:pPr>
+              <a:r>
+                <a:rPr kumimoji="1" lang="ja-JP" altLang="en-US" sz="1100"/>
+                <a:t>Process 3</a:t>
+              </a:r>
+            </a:p>
+          </p:txBody>
+        </p:sp>
+        <p:sp>
+          <p:nvSpPr>
+            <p:cNvPr id="42" name="テキスト ボックス 41">
+              <a:extLst>
+                <a:ext uri="{FF2B5EF4-FFF2-40B4-BE49-F238E27FC236}">
+                  <a16:creationId xmlns:a16="http://schemas.microsoft.com/office/drawing/2014/main" id="{ED8584A6-BE5E-AAC7-2DA1-3943337B7509}"/>
+                </a:ext>
+              </a:extLst>
+            </p:cNvPr>
+            <p:cNvSpPr txBox="1"/>
+            <p:nvPr/>
+          </p:nvSpPr>
+          <p:spPr>
+            <a:xfrm>
+              <a:off x="8312728" y="2971800"/>
+              <a:ext cx="821059" cy="261610"/>
+            </a:xfrm>
+            <a:prstGeom prst="rect">
+              <a:avLst/>
+            </a:prstGeom>
+            <a:noFill/>
+          </p:spPr>
+          <p:txBody>
+            <a:bodyPr wrap="none" rtlCol="0">
+              <a:spAutoFit/>
+            </a:bodyPr>
+            <a:lstStyle/>
+            <a:p>
+              <a:pPr>
+                <a:defRPr/>
+              </a:pPr>
+              <a:r>
+                <a:rPr kumimoji="1" lang="ja-JP" altLang="en-US" sz="1100"/>
+                <a:t>Process 4</a:t>
+              </a:r>
+            </a:p>
+          </p:txBody>
+        </p:sp>
+      </p:grpSp>
+      <p:grpSp>
+        <p:nvGrpSpPr>
+          <p:cNvPr id="43" name="グループ化 42">
             <a:extLst>
               <a:ext uri="{FF2B5EF4-FFF2-40B4-BE49-F238E27FC236}">
-                <a16:creationId xmlns:a16="http://schemas.microsoft.com/office/drawing/2014/main" id="{37CEC7DB-2DC2-FF43-A250-61F186B4F948}"/>
+                <a16:creationId xmlns:a16="http://schemas.microsoft.com/office/drawing/2014/main" id="{84BC7C01-3395-FC36-0AAF-6F8D7AADD048}"/>
               </a:ext>
             </a:extLst>
           </p:cNvPr>
-          <p:cNvSpPr/>
+          <p:cNvGrpSpPr/>
           <p:nvPr/>
-        </p:nvSpPr>
-        <p:spPr>
+        </p:nvGrpSpPr>
+        <p:grpSpPr>
           <a:xfrm>
-            <a:off x="1607128" y="4987636"/>
-            <a:ext cx="554181" cy="554182"/>
+            <a:off x="2377297" y="4612526"/>
+            <a:ext cx="5231296" cy="1743809"/>
+            <a:chOff x="2826797" y="4281055"/>
+            <a:chExt cx="6449283" cy="2149815"/>
           </a:xfrm>
-          <a:prstGeom prst="rightArrow">
-            <a:avLst/>
-          </a:prstGeom>
-          <a:solidFill>
-            <a:srgbClr val="FF0000"/>
-          </a:solidFill>
-        </p:spPr>
-        <p:style>
-          <a:lnRef idx="2">
-            <a:schemeClr val="accent1">
-              <a:shade val="50000"/>
-            </a:schemeClr>
-          </a:lnRef>
-          <a:fillRef idx="1">
-            <a:schemeClr val="accent1"/>
-          </a:fillRef>
-          <a:effectRef idx="0">
-            <a:schemeClr val="accent1"/>
-          </a:effectRef>
-          <a:fontRef idx="minor">
-            <a:schemeClr val="lt1"/>
-          </a:fontRef>
-        </p:style>
-        <p:txBody>
-          <a:bodyPr rtlCol="0" anchor="ctr"/>
-          <a:lstStyle/>
-          <a:p>
-            <a:pPr algn="ctr"/>
-            <a:endParaRPr kumimoji="1" lang="ja-JP" altLang="en-US"/>
-          </a:p>
-        </p:txBody>
-      </p:sp>
+        </p:grpSpPr>
+        <p:sp>
+          <p:nvSpPr>
+            <p:cNvPr id="44" name="正方形/長方形 43">
+              <a:extLst>
+                <a:ext uri="{FF2B5EF4-FFF2-40B4-BE49-F238E27FC236}">
+                  <a16:creationId xmlns:a16="http://schemas.microsoft.com/office/drawing/2014/main" id="{3236E328-D894-A2FA-9742-B161A96162B5}"/>
+                </a:ext>
+              </a:extLst>
+            </p:cNvPr>
+            <p:cNvSpPr/>
+            <p:nvPr/>
+          </p:nvSpPr>
+          <p:spPr>
+            <a:xfrm>
+              <a:off x="2826797" y="4343477"/>
+              <a:ext cx="942106" cy="1884212"/>
+            </a:xfrm>
+            <a:prstGeom prst="rect">
+              <a:avLst/>
+            </a:prstGeom>
+          </p:spPr>
+          <p:style>
+            <a:lnRef idx="2">
+              <a:schemeClr val="accent1">
+                <a:shade val="50000"/>
+              </a:schemeClr>
+            </a:lnRef>
+            <a:fillRef idx="1">
+              <a:schemeClr val="accent1"/>
+            </a:fillRef>
+            <a:effectRef idx="0">
+              <a:schemeClr val="accent1"/>
+            </a:effectRef>
+            <a:fontRef idx="minor">
+              <a:schemeClr val="lt1"/>
+            </a:fontRef>
+          </p:style>
+          <p:txBody>
+            <a:bodyPr rtlCol="0" anchor="ctr"/>
+            <a:lstStyle/>
+            <a:p>
+              <a:pPr algn="ctr"/>
+              <a:endParaRPr kumimoji="1" lang="ja-JP" altLang="en-US"/>
+            </a:p>
+          </p:txBody>
+        </p:sp>
+        <p:sp>
+          <p:nvSpPr>
+            <p:cNvPr id="45" name="右矢印 44">
+              <a:extLst>
+                <a:ext uri="{FF2B5EF4-FFF2-40B4-BE49-F238E27FC236}">
+                  <a16:creationId xmlns:a16="http://schemas.microsoft.com/office/drawing/2014/main" id="{A06F0A8C-F366-F4A3-DF6A-68AF3C87C6BD}"/>
+                </a:ext>
+              </a:extLst>
+            </p:cNvPr>
+            <p:cNvSpPr/>
+            <p:nvPr/>
+          </p:nvSpPr>
+          <p:spPr>
+            <a:xfrm>
+              <a:off x="4211782" y="4959927"/>
+              <a:ext cx="554181" cy="554182"/>
+            </a:xfrm>
+            <a:prstGeom prst="rightArrow">
+              <a:avLst/>
+            </a:prstGeom>
+            <a:solidFill>
+              <a:srgbClr val="FF0000"/>
+            </a:solidFill>
+          </p:spPr>
+          <p:style>
+            <a:lnRef idx="2">
+              <a:schemeClr val="accent1">
+                <a:shade val="50000"/>
+              </a:schemeClr>
+            </a:lnRef>
+            <a:fillRef idx="1">
+              <a:schemeClr val="accent1"/>
+            </a:fillRef>
+            <a:effectRef idx="0">
+              <a:schemeClr val="accent1"/>
+            </a:effectRef>
+            <a:fontRef idx="minor">
+              <a:schemeClr val="lt1"/>
+            </a:fontRef>
+          </p:style>
+          <p:txBody>
+            <a:bodyPr rtlCol="0" anchor="ctr"/>
+            <a:lstStyle/>
+            <a:p>
+              <a:pPr algn="ctr"/>
+              <a:endParaRPr kumimoji="1" lang="ja-JP" altLang="en-US"/>
+            </a:p>
+          </p:txBody>
+        </p:sp>
+        <p:sp>
+          <p:nvSpPr>
+            <p:cNvPr id="46" name="正方形/長方形 45">
+              <a:extLst>
+                <a:ext uri="{FF2B5EF4-FFF2-40B4-BE49-F238E27FC236}">
+                  <a16:creationId xmlns:a16="http://schemas.microsoft.com/office/drawing/2014/main" id="{D8585D0B-D9B8-F77E-AB36-032DCD0E0626}"/>
+                </a:ext>
+              </a:extLst>
+            </p:cNvPr>
+            <p:cNvSpPr/>
+            <p:nvPr/>
+          </p:nvSpPr>
+          <p:spPr>
+            <a:xfrm>
+              <a:off x="4925755" y="4281055"/>
+              <a:ext cx="942106" cy="1884212"/>
+            </a:xfrm>
+            <a:prstGeom prst="rect">
+              <a:avLst/>
+            </a:prstGeom>
+          </p:spPr>
+          <p:style>
+            <a:lnRef idx="2">
+              <a:schemeClr val="accent1">
+                <a:shade val="50000"/>
+              </a:schemeClr>
+            </a:lnRef>
+            <a:fillRef idx="1">
+              <a:schemeClr val="accent1"/>
+            </a:fillRef>
+            <a:effectRef idx="0">
+              <a:schemeClr val="accent1"/>
+            </a:effectRef>
+            <a:fontRef idx="minor">
+              <a:schemeClr val="lt1"/>
+            </a:fontRef>
+          </p:style>
+          <p:txBody>
+            <a:bodyPr rtlCol="0" anchor="ctr"/>
+            <a:lstStyle/>
+            <a:p>
+              <a:pPr algn="ctr"/>
+              <a:endParaRPr kumimoji="1" lang="ja-JP" altLang="en-US"/>
+            </a:p>
+          </p:txBody>
+        </p:sp>
+        <p:sp>
+          <p:nvSpPr>
+            <p:cNvPr id="47" name="正方形/長方形 46">
+              <a:extLst>
+                <a:ext uri="{FF2B5EF4-FFF2-40B4-BE49-F238E27FC236}">
+                  <a16:creationId xmlns:a16="http://schemas.microsoft.com/office/drawing/2014/main" id="{536BFBC2-B0BA-B312-8FBE-51A40C3D325F}"/>
+                </a:ext>
+              </a:extLst>
+            </p:cNvPr>
+            <p:cNvSpPr/>
+            <p:nvPr/>
+          </p:nvSpPr>
+          <p:spPr>
+            <a:xfrm>
+              <a:off x="6089537" y="4281055"/>
+              <a:ext cx="942106" cy="1884212"/>
+            </a:xfrm>
+            <a:prstGeom prst="rect">
+              <a:avLst/>
+            </a:prstGeom>
+          </p:spPr>
+          <p:style>
+            <a:lnRef idx="2">
+              <a:schemeClr val="accent1">
+                <a:shade val="50000"/>
+              </a:schemeClr>
+            </a:lnRef>
+            <a:fillRef idx="1">
+              <a:schemeClr val="accent1"/>
+            </a:fillRef>
+            <a:effectRef idx="0">
+              <a:schemeClr val="accent1"/>
+            </a:effectRef>
+            <a:fontRef idx="minor">
+              <a:schemeClr val="lt1"/>
+            </a:fontRef>
+          </p:style>
+          <p:txBody>
+            <a:bodyPr rtlCol="0" anchor="ctr"/>
+            <a:lstStyle/>
+            <a:p>
+              <a:pPr algn="ctr"/>
+              <a:endParaRPr kumimoji="1" lang="ja-JP" altLang="en-US"/>
+            </a:p>
+          </p:txBody>
+        </p:sp>
+        <p:sp>
+          <p:nvSpPr>
+            <p:cNvPr id="48" name="正方形/長方形 47">
+              <a:extLst>
+                <a:ext uri="{FF2B5EF4-FFF2-40B4-BE49-F238E27FC236}">
+                  <a16:creationId xmlns:a16="http://schemas.microsoft.com/office/drawing/2014/main" id="{EB1EBB0B-E78F-7E34-0813-A9F667AC4D13}"/>
+                </a:ext>
+              </a:extLst>
+            </p:cNvPr>
+            <p:cNvSpPr/>
+            <p:nvPr/>
+          </p:nvSpPr>
+          <p:spPr>
+            <a:xfrm>
+              <a:off x="7211755" y="4281055"/>
+              <a:ext cx="942106" cy="1884212"/>
+            </a:xfrm>
+            <a:prstGeom prst="rect">
+              <a:avLst/>
+            </a:prstGeom>
+          </p:spPr>
+          <p:style>
+            <a:lnRef idx="2">
+              <a:schemeClr val="accent1">
+                <a:shade val="50000"/>
+              </a:schemeClr>
+            </a:lnRef>
+            <a:fillRef idx="1">
+              <a:schemeClr val="accent1"/>
+            </a:fillRef>
+            <a:effectRef idx="0">
+              <a:schemeClr val="accent1"/>
+            </a:effectRef>
+            <a:fontRef idx="minor">
+              <a:schemeClr val="lt1"/>
+            </a:fontRef>
+          </p:style>
+          <p:txBody>
+            <a:bodyPr rtlCol="0" anchor="ctr"/>
+            <a:lstStyle/>
+            <a:p>
+              <a:pPr algn="ctr"/>
+              <a:endParaRPr kumimoji="1" lang="ja-JP" altLang="en-US"/>
+            </a:p>
+          </p:txBody>
+        </p:sp>
+        <p:sp>
+          <p:nvSpPr>
+            <p:cNvPr id="49" name="正方形/長方形 48">
+              <a:extLst>
+                <a:ext uri="{FF2B5EF4-FFF2-40B4-BE49-F238E27FC236}">
+                  <a16:creationId xmlns:a16="http://schemas.microsoft.com/office/drawing/2014/main" id="{CE67CCF2-874E-20FE-986C-EFC5750F573F}"/>
+                </a:ext>
+              </a:extLst>
+            </p:cNvPr>
+            <p:cNvSpPr/>
+            <p:nvPr/>
+          </p:nvSpPr>
+          <p:spPr>
+            <a:xfrm>
+              <a:off x="8333974" y="4281056"/>
+              <a:ext cx="942106" cy="1884212"/>
+            </a:xfrm>
+            <a:prstGeom prst="rect">
+              <a:avLst/>
+            </a:prstGeom>
+          </p:spPr>
+          <p:style>
+            <a:lnRef idx="2">
+              <a:schemeClr val="accent1">
+                <a:shade val="50000"/>
+              </a:schemeClr>
+            </a:lnRef>
+            <a:fillRef idx="1">
+              <a:schemeClr val="accent1"/>
+            </a:fillRef>
+            <a:effectRef idx="0">
+              <a:schemeClr val="accent1"/>
+            </a:effectRef>
+            <a:fontRef idx="minor">
+              <a:schemeClr val="lt1"/>
+            </a:fontRef>
+          </p:style>
+          <p:txBody>
+            <a:bodyPr rtlCol="0" anchor="ctr"/>
+            <a:lstStyle/>
+            <a:p>
+              <a:pPr algn="ctr"/>
+              <a:endParaRPr kumimoji="1" lang="ja-JP" altLang="en-US"/>
+            </a:p>
+          </p:txBody>
+        </p:sp>
+        <p:sp>
+          <p:nvSpPr>
+            <p:cNvPr id="50" name="テキスト ボックス 49">
+              <a:extLst>
+                <a:ext uri="{FF2B5EF4-FFF2-40B4-BE49-F238E27FC236}">
+                  <a16:creationId xmlns:a16="http://schemas.microsoft.com/office/drawing/2014/main" id="{550732CF-1B70-693B-E810-6FC969C8EC73}"/>
+                </a:ext>
+              </a:extLst>
+            </p:cNvPr>
+            <p:cNvSpPr txBox="1"/>
+            <p:nvPr/>
+          </p:nvSpPr>
+          <p:spPr>
+            <a:xfrm>
+              <a:off x="5033352" y="6169260"/>
+              <a:ext cx="821059" cy="261610"/>
+            </a:xfrm>
+            <a:prstGeom prst="rect">
+              <a:avLst/>
+            </a:prstGeom>
+            <a:noFill/>
+          </p:spPr>
+          <p:txBody>
+            <a:bodyPr wrap="none" rtlCol="0">
+              <a:spAutoFit/>
+            </a:bodyPr>
+            <a:lstStyle/>
+            <a:p>
+              <a:pPr>
+                <a:defRPr/>
+              </a:pPr>
+              <a:r>
+                <a:rPr kumimoji="1" lang="ja-JP" altLang="en-US" sz="1100"/>
+                <a:t>Process 1</a:t>
+              </a:r>
+            </a:p>
+          </p:txBody>
+        </p:sp>
+        <p:sp>
+          <p:nvSpPr>
+            <p:cNvPr id="51" name="テキスト ボックス 50">
+              <a:extLst>
+                <a:ext uri="{FF2B5EF4-FFF2-40B4-BE49-F238E27FC236}">
+                  <a16:creationId xmlns:a16="http://schemas.microsoft.com/office/drawing/2014/main" id="{46BBE71F-838C-BC48-9AE4-6880AD10FDE6}"/>
+                </a:ext>
+              </a:extLst>
+            </p:cNvPr>
+            <p:cNvSpPr txBox="1"/>
+            <p:nvPr/>
+          </p:nvSpPr>
+          <p:spPr>
+            <a:xfrm>
+              <a:off x="6150464" y="6169260"/>
+              <a:ext cx="821059" cy="261610"/>
+            </a:xfrm>
+            <a:prstGeom prst="rect">
+              <a:avLst/>
+            </a:prstGeom>
+            <a:noFill/>
+          </p:spPr>
+          <p:txBody>
+            <a:bodyPr wrap="none" rtlCol="0">
+              <a:spAutoFit/>
+            </a:bodyPr>
+            <a:lstStyle/>
+            <a:p>
+              <a:pPr>
+                <a:defRPr/>
+              </a:pPr>
+              <a:r>
+                <a:rPr kumimoji="1" lang="ja-JP" altLang="en-US" sz="1100"/>
+                <a:t>Process 2</a:t>
+              </a:r>
+            </a:p>
+          </p:txBody>
+        </p:sp>
+        <p:sp>
+          <p:nvSpPr>
+            <p:cNvPr id="52" name="テキスト ボックス 51">
+              <a:extLst>
+                <a:ext uri="{FF2B5EF4-FFF2-40B4-BE49-F238E27FC236}">
+                  <a16:creationId xmlns:a16="http://schemas.microsoft.com/office/drawing/2014/main" id="{7D5046E4-A001-85D0-8128-F448FCED5B84}"/>
+                </a:ext>
+              </a:extLst>
+            </p:cNvPr>
+            <p:cNvSpPr txBox="1"/>
+            <p:nvPr/>
+          </p:nvSpPr>
+          <p:spPr>
+            <a:xfrm>
+              <a:off x="7250080" y="6169260"/>
+              <a:ext cx="821059" cy="261610"/>
+            </a:xfrm>
+            <a:prstGeom prst="rect">
+              <a:avLst/>
+            </a:prstGeom>
+            <a:noFill/>
+          </p:spPr>
+          <p:txBody>
+            <a:bodyPr wrap="none" rtlCol="0">
+              <a:spAutoFit/>
+            </a:bodyPr>
+            <a:lstStyle/>
+            <a:p>
+              <a:pPr>
+                <a:defRPr/>
+              </a:pPr>
+              <a:r>
+                <a:rPr kumimoji="1" lang="ja-JP" altLang="en-US" sz="1100"/>
+                <a:t>Process 3</a:t>
+              </a:r>
+            </a:p>
+          </p:txBody>
+        </p:sp>
+        <p:sp>
+          <p:nvSpPr>
+            <p:cNvPr id="53" name="テキスト ボックス 52">
+              <a:extLst>
+                <a:ext uri="{FF2B5EF4-FFF2-40B4-BE49-F238E27FC236}">
+                  <a16:creationId xmlns:a16="http://schemas.microsoft.com/office/drawing/2014/main" id="{41A66804-1ABE-DD3E-9A2F-5E2420CD02B8}"/>
+                </a:ext>
+              </a:extLst>
+            </p:cNvPr>
+            <p:cNvSpPr txBox="1"/>
+            <p:nvPr/>
+          </p:nvSpPr>
+          <p:spPr>
+            <a:xfrm>
+              <a:off x="8367192" y="6169260"/>
+              <a:ext cx="821059" cy="261610"/>
+            </a:xfrm>
+            <a:prstGeom prst="rect">
+              <a:avLst/>
+            </a:prstGeom>
+            <a:noFill/>
+          </p:spPr>
+          <p:txBody>
+            <a:bodyPr wrap="none" rtlCol="0">
+              <a:spAutoFit/>
+            </a:bodyPr>
+            <a:lstStyle/>
+            <a:p>
+              <a:pPr>
+                <a:defRPr/>
+              </a:pPr>
+              <a:r>
+                <a:rPr kumimoji="1" lang="ja-JP" altLang="en-US" sz="1100"/>
+                <a:t>Process 4</a:t>
+              </a:r>
+            </a:p>
+          </p:txBody>
+        </p:sp>
+      </p:grpSp>
       <p:sp>
         <p:nvSpPr>
-          <p:cNvPr id="17" name="右矢印 16">
+          <p:cNvPr id="58" name="テキスト ボックス 57">
             <a:extLst>
               <a:ext uri="{FF2B5EF4-FFF2-40B4-BE49-F238E27FC236}">
-                <a16:creationId xmlns:a16="http://schemas.microsoft.com/office/drawing/2014/main" id="{68B7FB71-3337-5F4B-B07E-C9AE7671D09A}"/>
-              </a:ext>
-            </a:extLst>
-          </p:cNvPr>
-          <p:cNvSpPr/>
-          <p:nvPr/>
-        </p:nvSpPr>
-        <p:spPr>
-          <a:xfrm>
-            <a:off x="4211782" y="4959927"/>
-            <a:ext cx="554181" cy="554182"/>
-          </a:xfrm>
-          <a:prstGeom prst="rightArrow">
-            <a:avLst/>
-          </a:prstGeom>
-          <a:solidFill>
-            <a:srgbClr val="FF0000"/>
-          </a:solidFill>
-        </p:spPr>
-        <p:style>
-          <a:lnRef idx="2">
-            <a:schemeClr val="accent1">
-              <a:shade val="50000"/>
-            </a:schemeClr>
-          </a:lnRef>
-          <a:fillRef idx="1">
-            <a:schemeClr val="accent1"/>
-          </a:fillRef>
-          <a:effectRef idx="0">
-            <a:schemeClr val="accent1"/>
-          </a:effectRef>
-          <a:fontRef idx="minor">
-            <a:schemeClr val="lt1"/>
-          </a:fontRef>
-        </p:style>
-        <p:txBody>
-          <a:bodyPr rtlCol="0" anchor="ctr"/>
-          <a:lstStyle/>
-          <a:p>
-            <a:pPr algn="ctr"/>
-            <a:endParaRPr kumimoji="1" lang="ja-JP" altLang="en-US"/>
-          </a:p>
-        </p:txBody>
-      </p:sp>
-      <p:sp>
-        <p:nvSpPr>
-          <p:cNvPr id="18" name="正方形/長方形 17">
-            <a:extLst>
-              <a:ext uri="{FF2B5EF4-FFF2-40B4-BE49-F238E27FC236}">
-                <a16:creationId xmlns:a16="http://schemas.microsoft.com/office/drawing/2014/main" id="{67FA7351-D9B2-FA4D-814A-CB0A471DD018}"/>
-              </a:ext>
-            </a:extLst>
-          </p:cNvPr>
-          <p:cNvSpPr/>
-          <p:nvPr/>
-        </p:nvSpPr>
-        <p:spPr>
-          <a:xfrm>
-            <a:off x="4925755" y="4281055"/>
-            <a:ext cx="942106" cy="1884212"/>
-          </a:xfrm>
-          <a:prstGeom prst="rect">
-            <a:avLst/>
-          </a:prstGeom>
-        </p:spPr>
-        <p:style>
-          <a:lnRef idx="2">
-            <a:schemeClr val="accent1">
-              <a:shade val="50000"/>
-            </a:schemeClr>
-          </a:lnRef>
-          <a:fillRef idx="1">
-            <a:schemeClr val="accent1"/>
-          </a:fillRef>
-          <a:effectRef idx="0">
-            <a:schemeClr val="accent1"/>
-          </a:effectRef>
-          <a:fontRef idx="minor">
-            <a:schemeClr val="lt1"/>
-          </a:fontRef>
-        </p:style>
-        <p:txBody>
-          <a:bodyPr rtlCol="0" anchor="ctr"/>
-          <a:lstStyle/>
-          <a:p>
-            <a:pPr algn="ctr"/>
-            <a:endParaRPr kumimoji="1" lang="ja-JP" altLang="en-US"/>
-          </a:p>
-        </p:txBody>
-      </p:sp>
-      <p:sp>
-        <p:nvSpPr>
-          <p:cNvPr id="19" name="正方形/長方形 18">
-            <a:extLst>
-              <a:ext uri="{FF2B5EF4-FFF2-40B4-BE49-F238E27FC236}">
-                <a16:creationId xmlns:a16="http://schemas.microsoft.com/office/drawing/2014/main" id="{7328A581-972C-4544-8BF0-8C61B4E7F64B}"/>
-              </a:ext>
-            </a:extLst>
-          </p:cNvPr>
-          <p:cNvSpPr/>
-          <p:nvPr/>
-        </p:nvSpPr>
-        <p:spPr>
-          <a:xfrm>
-            <a:off x="6089537" y="4281055"/>
-            <a:ext cx="942106" cy="1884212"/>
-          </a:xfrm>
-          <a:prstGeom prst="rect">
-            <a:avLst/>
-          </a:prstGeom>
-        </p:spPr>
-        <p:style>
-          <a:lnRef idx="2">
-            <a:schemeClr val="accent1">
-              <a:shade val="50000"/>
-            </a:schemeClr>
-          </a:lnRef>
-          <a:fillRef idx="1">
-            <a:schemeClr val="accent1"/>
-          </a:fillRef>
-          <a:effectRef idx="0">
-            <a:schemeClr val="accent1"/>
-          </a:effectRef>
-          <a:fontRef idx="minor">
-            <a:schemeClr val="lt1"/>
-          </a:fontRef>
-        </p:style>
-        <p:txBody>
-          <a:bodyPr rtlCol="0" anchor="ctr"/>
-          <a:lstStyle/>
-          <a:p>
-            <a:pPr algn="ctr"/>
-            <a:endParaRPr kumimoji="1" lang="ja-JP" altLang="en-US"/>
-          </a:p>
-        </p:txBody>
-      </p:sp>
-      <p:sp>
-        <p:nvSpPr>
-          <p:cNvPr id="20" name="正方形/長方形 19">
-            <a:extLst>
-              <a:ext uri="{FF2B5EF4-FFF2-40B4-BE49-F238E27FC236}">
-                <a16:creationId xmlns:a16="http://schemas.microsoft.com/office/drawing/2014/main" id="{1D01F16D-78D2-CE45-B00D-3A0F133F73F2}"/>
-              </a:ext>
-            </a:extLst>
-          </p:cNvPr>
-          <p:cNvSpPr/>
-          <p:nvPr/>
-        </p:nvSpPr>
-        <p:spPr>
-          <a:xfrm>
-            <a:off x="7211755" y="4281055"/>
-            <a:ext cx="942106" cy="1884212"/>
-          </a:xfrm>
-          <a:prstGeom prst="rect">
-            <a:avLst/>
-          </a:prstGeom>
-        </p:spPr>
-        <p:style>
-          <a:lnRef idx="2">
-            <a:schemeClr val="accent1">
-              <a:shade val="50000"/>
-            </a:schemeClr>
-          </a:lnRef>
-          <a:fillRef idx="1">
-            <a:schemeClr val="accent1"/>
-          </a:fillRef>
-          <a:effectRef idx="0">
-            <a:schemeClr val="accent1"/>
-          </a:effectRef>
-          <a:fontRef idx="minor">
-            <a:schemeClr val="lt1"/>
-          </a:fontRef>
-        </p:style>
-        <p:txBody>
-          <a:bodyPr rtlCol="0" anchor="ctr"/>
-          <a:lstStyle/>
-          <a:p>
-            <a:pPr algn="ctr"/>
-            <a:endParaRPr kumimoji="1" lang="ja-JP" altLang="en-US"/>
-          </a:p>
-        </p:txBody>
-      </p:sp>
-      <p:sp>
-        <p:nvSpPr>
-          <p:cNvPr id="21" name="正方形/長方形 20">
-            <a:extLst>
-              <a:ext uri="{FF2B5EF4-FFF2-40B4-BE49-F238E27FC236}">
-                <a16:creationId xmlns:a16="http://schemas.microsoft.com/office/drawing/2014/main" id="{22E78869-39CE-184B-B2F5-02CA83317CF7}"/>
-              </a:ext>
-            </a:extLst>
-          </p:cNvPr>
-          <p:cNvSpPr/>
-          <p:nvPr/>
-        </p:nvSpPr>
-        <p:spPr>
-          <a:xfrm>
-            <a:off x="8333974" y="4281056"/>
-            <a:ext cx="942106" cy="1884212"/>
-          </a:xfrm>
-          <a:prstGeom prst="rect">
-            <a:avLst/>
-          </a:prstGeom>
-        </p:spPr>
-        <p:style>
-          <a:lnRef idx="2">
-            <a:schemeClr val="accent1">
-              <a:shade val="50000"/>
-            </a:schemeClr>
-          </a:lnRef>
-          <a:fillRef idx="1">
-            <a:schemeClr val="accent1"/>
-          </a:fillRef>
-          <a:effectRef idx="0">
-            <a:schemeClr val="accent1"/>
-          </a:effectRef>
-          <a:fontRef idx="minor">
-            <a:schemeClr val="lt1"/>
-          </a:fontRef>
-        </p:style>
-        <p:txBody>
-          <a:bodyPr rtlCol="0" anchor="ctr"/>
-          <a:lstStyle/>
-          <a:p>
-            <a:pPr algn="ctr"/>
-            <a:endParaRPr kumimoji="1" lang="ja-JP" altLang="en-US"/>
-          </a:p>
-        </p:txBody>
-      </p:sp>
-      <p:sp>
-        <p:nvSpPr>
-          <p:cNvPr id="24" name="テキスト ボックス 23">
-            <a:extLst>
-              <a:ext uri="{FF2B5EF4-FFF2-40B4-BE49-F238E27FC236}">
-                <a16:creationId xmlns:a16="http://schemas.microsoft.com/office/drawing/2014/main" id="{142E7465-C6D6-4C46-8B46-6ADB5ABC80A6}"/>
+                <a16:creationId xmlns:a16="http://schemas.microsoft.com/office/drawing/2014/main" id="{6699BEF8-4039-91AF-6F0D-660E1CFB9C27}"/>
               </a:ext>
             </a:extLst>
           </p:cNvPr>
@@ -1822,8 +2010,8 @@
         </p:nvSpPr>
         <p:spPr>
           <a:xfrm>
-            <a:off x="4987636" y="2978727"/>
-            <a:ext cx="821059" cy="261610"/>
+            <a:off x="1600246" y="1043768"/>
+            <a:ext cx="2279888" cy="369332"/>
           </a:xfrm>
           <a:prstGeom prst="rect">
             <a:avLst/>
@@ -1831,29 +2019,24 @@
           <a:noFill/>
         </p:spPr>
         <p:txBody>
-          <a:bodyPr wrap="none" rtlCol="0">
+          <a:bodyPr wrap="square">
             <a:spAutoFit/>
           </a:bodyPr>
           <a:lstStyle/>
           <a:p>
             <a:r>
-              <a:rPr kumimoji="1" lang="ja-JP" altLang="en-US" sz="1100"/>
-              <a:t>プロセス</a:t>
+              <a:rPr lang="ja-JP" altLang="en-US"/>
+              <a:t>sequential computing</a:t>
             </a:r>
-            <a:r>
-              <a:rPr kumimoji="1" lang="en-US" altLang="ja-JP" sz="1100"/>
-              <a:t>1</a:t>
-            </a:r>
-            <a:endParaRPr kumimoji="1" lang="ja-JP" altLang="en-US" sz="1100"/>
           </a:p>
         </p:txBody>
       </p:sp>
       <p:sp>
         <p:nvSpPr>
-          <p:cNvPr id="25" name="テキスト ボックス 24">
+          <p:cNvPr id="59" name="テキスト ボックス 58">
             <a:extLst>
               <a:ext uri="{FF2B5EF4-FFF2-40B4-BE49-F238E27FC236}">
-                <a16:creationId xmlns:a16="http://schemas.microsoft.com/office/drawing/2014/main" id="{C87403A7-5F83-8E4F-AC1F-7D2C3C38FF31}"/>
+                <a16:creationId xmlns:a16="http://schemas.microsoft.com/office/drawing/2014/main" id="{A633E4D6-39B0-0C7D-B548-7CE6C27634D6}"/>
               </a:ext>
             </a:extLst>
           </p:cNvPr>
@@ -1862,8 +2045,8 @@
         </p:nvSpPr>
         <p:spPr>
           <a:xfrm>
-            <a:off x="6165272" y="2964873"/>
-            <a:ext cx="821059" cy="261610"/>
+            <a:off x="4885924" y="1043768"/>
+            <a:ext cx="2279888" cy="369332"/>
           </a:xfrm>
           <a:prstGeom prst="rect">
             <a:avLst/>
@@ -1871,29 +2054,28 @@
           <a:noFill/>
         </p:spPr>
         <p:txBody>
-          <a:bodyPr wrap="none" rtlCol="0">
+          <a:bodyPr wrap="square">
             <a:spAutoFit/>
           </a:bodyPr>
           <a:lstStyle/>
           <a:p>
             <a:r>
-              <a:rPr kumimoji="1" lang="ja-JP" altLang="en-US" sz="1100"/>
-              <a:t>プロセス</a:t>
+              <a:rPr lang="en-US" altLang="ja-JP" dirty="0"/>
+              <a:t>parallel</a:t>
             </a:r>
             <a:r>
-              <a:rPr kumimoji="1" lang="en-US" altLang="ja-JP" sz="1100"/>
-              <a:t>2</a:t>
+              <a:rPr lang="ja-JP" altLang="en-US"/>
+              <a:t> computing</a:t>
             </a:r>
-            <a:endParaRPr kumimoji="1" lang="ja-JP" altLang="en-US" sz="1100"/>
           </a:p>
         </p:txBody>
       </p:sp>
       <p:sp>
         <p:nvSpPr>
-          <p:cNvPr id="26" name="テキスト ボックス 25">
+          <p:cNvPr id="60" name="テキスト ボックス 59">
             <a:extLst>
               <a:ext uri="{FF2B5EF4-FFF2-40B4-BE49-F238E27FC236}">
-                <a16:creationId xmlns:a16="http://schemas.microsoft.com/office/drawing/2014/main" id="{1FF5385A-F508-424C-B939-6F70C723E6BC}"/>
+                <a16:creationId xmlns:a16="http://schemas.microsoft.com/office/drawing/2014/main" id="{C84BA2BC-07D0-0627-4398-9D7AF9B4E4C8}"/>
               </a:ext>
             </a:extLst>
           </p:cNvPr>
@@ -1902,8 +2084,8 @@
         </p:nvSpPr>
         <p:spPr>
           <a:xfrm>
-            <a:off x="7204363" y="2978727"/>
-            <a:ext cx="821059" cy="261610"/>
+            <a:off x="1670351" y="4182785"/>
+            <a:ext cx="2279888" cy="369332"/>
           </a:xfrm>
           <a:prstGeom prst="rect">
             <a:avLst/>
@@ -1911,29 +2093,24 @@
           <a:noFill/>
         </p:spPr>
         <p:txBody>
-          <a:bodyPr wrap="none" rtlCol="0">
+          <a:bodyPr wrap="square">
             <a:spAutoFit/>
           </a:bodyPr>
           <a:lstStyle/>
           <a:p>
             <a:r>
-              <a:rPr kumimoji="1" lang="ja-JP" altLang="en-US" sz="1100"/>
-              <a:t>プロセス</a:t>
+              <a:rPr lang="ja-JP" altLang="en-US"/>
+              <a:t>sequential computing</a:t>
             </a:r>
-            <a:r>
-              <a:rPr kumimoji="1" lang="en-US" altLang="ja-JP" sz="1100"/>
-              <a:t>3</a:t>
-            </a:r>
-            <a:endParaRPr kumimoji="1" lang="ja-JP" altLang="en-US" sz="1100"/>
           </a:p>
         </p:txBody>
       </p:sp>
       <p:sp>
         <p:nvSpPr>
-          <p:cNvPr id="27" name="テキスト ボックス 26">
+          <p:cNvPr id="61" name="テキスト ボックス 60">
             <a:extLst>
               <a:ext uri="{FF2B5EF4-FFF2-40B4-BE49-F238E27FC236}">
-                <a16:creationId xmlns:a16="http://schemas.microsoft.com/office/drawing/2014/main" id="{502DDAC4-61D5-F04F-B806-F96E4370B8B2}"/>
+                <a16:creationId xmlns:a16="http://schemas.microsoft.com/office/drawing/2014/main" id="{7F3BF775-6CF8-E9AC-87E2-0030C9DA6100}"/>
               </a:ext>
             </a:extLst>
           </p:cNvPr>
@@ -1942,8 +2119,8 @@
         </p:nvSpPr>
         <p:spPr>
           <a:xfrm>
-            <a:off x="8381999" y="2964873"/>
-            <a:ext cx="821059" cy="261610"/>
+            <a:off x="4956029" y="4182785"/>
+            <a:ext cx="2279888" cy="369332"/>
           </a:xfrm>
           <a:prstGeom prst="rect">
             <a:avLst/>
@@ -1951,180 +2128,19 @@
           <a:noFill/>
         </p:spPr>
         <p:txBody>
-          <a:bodyPr wrap="none" rtlCol="0">
+          <a:bodyPr wrap="square">
             <a:spAutoFit/>
           </a:bodyPr>
           <a:lstStyle/>
           <a:p>
             <a:r>
-              <a:rPr kumimoji="1" lang="ja-JP" altLang="en-US" sz="1100"/>
-              <a:t>プロセス</a:t>
+              <a:rPr lang="en-US" altLang="ja-JP" dirty="0"/>
+              <a:t>parallel</a:t>
             </a:r>
             <a:r>
-              <a:rPr kumimoji="1" lang="en-US" altLang="ja-JP" sz="1100"/>
-              <a:t>4</a:t>
+              <a:rPr lang="ja-JP" altLang="en-US"/>
+              <a:t> computing</a:t>
             </a:r>
-            <a:endParaRPr kumimoji="1" lang="ja-JP" altLang="en-US" sz="1100"/>
-          </a:p>
-        </p:txBody>
-      </p:sp>
-      <p:sp>
-        <p:nvSpPr>
-          <p:cNvPr id="28" name="テキスト ボックス 27">
-            <a:extLst>
-              <a:ext uri="{FF2B5EF4-FFF2-40B4-BE49-F238E27FC236}">
-                <a16:creationId xmlns:a16="http://schemas.microsoft.com/office/drawing/2014/main" id="{8F906CC6-2BA1-D743-8442-B4524D54FC6B}"/>
-              </a:ext>
-            </a:extLst>
-          </p:cNvPr>
-          <p:cNvSpPr txBox="1"/>
-          <p:nvPr/>
-        </p:nvSpPr>
-        <p:spPr>
-          <a:xfrm>
-            <a:off x="5001491" y="6179127"/>
-            <a:ext cx="821059" cy="261610"/>
-          </a:xfrm>
-          <a:prstGeom prst="rect">
-            <a:avLst/>
-          </a:prstGeom>
-          <a:noFill/>
-        </p:spPr>
-        <p:txBody>
-          <a:bodyPr wrap="none" rtlCol="0">
-            <a:spAutoFit/>
-          </a:bodyPr>
-          <a:lstStyle/>
-          <a:p>
-            <a:r>
-              <a:rPr kumimoji="1" lang="ja-JP" altLang="en-US" sz="1100"/>
-              <a:t>プロセス</a:t>
-            </a:r>
-            <a:r>
-              <a:rPr kumimoji="1" lang="en-US" altLang="ja-JP" sz="1100"/>
-              <a:t>1</a:t>
-            </a:r>
-            <a:endParaRPr kumimoji="1" lang="ja-JP" altLang="en-US" sz="1100"/>
-          </a:p>
-        </p:txBody>
-      </p:sp>
-      <p:sp>
-        <p:nvSpPr>
-          <p:cNvPr id="29" name="テキスト ボックス 28">
-            <a:extLst>
-              <a:ext uri="{FF2B5EF4-FFF2-40B4-BE49-F238E27FC236}">
-                <a16:creationId xmlns:a16="http://schemas.microsoft.com/office/drawing/2014/main" id="{2EE6D1B7-16B6-EF48-949F-51085EE6EABA}"/>
-              </a:ext>
-            </a:extLst>
-          </p:cNvPr>
-          <p:cNvSpPr txBox="1"/>
-          <p:nvPr/>
-        </p:nvSpPr>
-        <p:spPr>
-          <a:xfrm>
-            <a:off x="6179127" y="6165273"/>
-            <a:ext cx="821059" cy="261610"/>
-          </a:xfrm>
-          <a:prstGeom prst="rect">
-            <a:avLst/>
-          </a:prstGeom>
-          <a:noFill/>
-        </p:spPr>
-        <p:txBody>
-          <a:bodyPr wrap="none" rtlCol="0">
-            <a:spAutoFit/>
-          </a:bodyPr>
-          <a:lstStyle/>
-          <a:p>
-            <a:r>
-              <a:rPr kumimoji="1" lang="ja-JP" altLang="en-US" sz="1100"/>
-              <a:t>プロセス</a:t>
-            </a:r>
-            <a:r>
-              <a:rPr kumimoji="1" lang="en-US" altLang="ja-JP" sz="1100"/>
-              <a:t>2</a:t>
-            </a:r>
-            <a:endParaRPr kumimoji="1" lang="ja-JP" altLang="en-US" sz="1100"/>
-          </a:p>
-        </p:txBody>
-      </p:sp>
-      <p:sp>
-        <p:nvSpPr>
-          <p:cNvPr id="30" name="テキスト ボックス 29">
-            <a:extLst>
-              <a:ext uri="{FF2B5EF4-FFF2-40B4-BE49-F238E27FC236}">
-                <a16:creationId xmlns:a16="http://schemas.microsoft.com/office/drawing/2014/main" id="{BE2C495E-E17E-F840-A042-03720D3ADB8F}"/>
-              </a:ext>
-            </a:extLst>
-          </p:cNvPr>
-          <p:cNvSpPr txBox="1"/>
-          <p:nvPr/>
-        </p:nvSpPr>
-        <p:spPr>
-          <a:xfrm>
-            <a:off x="7218218" y="6179127"/>
-            <a:ext cx="821059" cy="261610"/>
-          </a:xfrm>
-          <a:prstGeom prst="rect">
-            <a:avLst/>
-          </a:prstGeom>
-          <a:noFill/>
-        </p:spPr>
-        <p:txBody>
-          <a:bodyPr wrap="none" rtlCol="0">
-            <a:spAutoFit/>
-          </a:bodyPr>
-          <a:lstStyle/>
-          <a:p>
-            <a:r>
-              <a:rPr kumimoji="1" lang="ja-JP" altLang="en-US" sz="1100"/>
-              <a:t>プロセス</a:t>
-            </a:r>
-            <a:r>
-              <a:rPr kumimoji="1" lang="en-US" altLang="ja-JP" sz="1100"/>
-              <a:t>3</a:t>
-            </a:r>
-            <a:endParaRPr kumimoji="1" lang="ja-JP" altLang="en-US" sz="1100"/>
-          </a:p>
-        </p:txBody>
-      </p:sp>
-      <p:sp>
-        <p:nvSpPr>
-          <p:cNvPr id="31" name="テキスト ボックス 30">
-            <a:extLst>
-              <a:ext uri="{FF2B5EF4-FFF2-40B4-BE49-F238E27FC236}">
-                <a16:creationId xmlns:a16="http://schemas.microsoft.com/office/drawing/2014/main" id="{F0AB668F-7572-6D43-8245-4EB121EC61AF}"/>
-              </a:ext>
-            </a:extLst>
-          </p:cNvPr>
-          <p:cNvSpPr txBox="1"/>
-          <p:nvPr/>
-        </p:nvSpPr>
-        <p:spPr>
-          <a:xfrm>
-            <a:off x="8395854" y="6165273"/>
-            <a:ext cx="821059" cy="261610"/>
-          </a:xfrm>
-          <a:prstGeom prst="rect">
-            <a:avLst/>
-          </a:prstGeom>
-          <a:noFill/>
-        </p:spPr>
-        <p:txBody>
-          <a:bodyPr wrap="none" rtlCol="0">
-            <a:spAutoFit/>
-          </a:bodyPr>
-          <a:lstStyle/>
-          <a:p>
-            <a:r>
-              <a:rPr kumimoji="1" lang="ja-JP" altLang="en-US" sz="1100"/>
-              <a:t>プロセス</a:t>
-            </a:r>
-            <a:r>
-              <a:rPr kumimoji="1" lang="en-US" altLang="ja-JP" sz="1100"/>
-              <a:t>4</a:t>
-            </a:r>
-            <a:endParaRPr kumimoji="1" lang="ja-JP" altLang="en-US" sz="1100"/>
           </a:p>
         </p:txBody>
       </p:sp>
@@ -2172,8 +2188,8 @@
         </p:nvSpPr>
         <p:spPr>
           <a:xfrm>
-            <a:off x="207818" y="3588327"/>
-            <a:ext cx="9490363" cy="2840182"/>
+            <a:off x="629920" y="3588327"/>
+            <a:ext cx="9068261" cy="2840182"/>
           </a:xfrm>
           <a:prstGeom prst="roundRect">
             <a:avLst/>
@@ -2221,8 +2237,8 @@
         </p:nvSpPr>
         <p:spPr>
           <a:xfrm>
-            <a:off x="166255" y="387927"/>
-            <a:ext cx="9490363" cy="2840182"/>
+            <a:off x="657178" y="386301"/>
+            <a:ext cx="9006367" cy="2840182"/>
           </a:xfrm>
           <a:prstGeom prst="roundRect">
             <a:avLst/>
@@ -2262,296 +2278,6 @@
           </a:p>
         </p:txBody>
       </p:sp>
-      <p:pic>
-        <p:nvPicPr>
-          <p:cNvPr id="2" name="図 1">
-            <a:extLst>
-              <a:ext uri="{FF2B5EF4-FFF2-40B4-BE49-F238E27FC236}">
-                <a16:creationId xmlns:a16="http://schemas.microsoft.com/office/drawing/2014/main" id="{AB393E77-B79F-F249-811A-378CCB7116A4}"/>
-              </a:ext>
-            </a:extLst>
-          </p:cNvPr>
-          <p:cNvPicPr>
-            <a:picLocks noChangeAspect="1"/>
-          </p:cNvPicPr>
-          <p:nvPr/>
-        </p:nvPicPr>
-        <p:blipFill>
-          <a:blip r:embed="rId2"/>
-          <a:stretch>
-            <a:fillRect/>
-          </a:stretch>
-        </p:blipFill>
-        <p:spPr>
-          <a:xfrm>
-            <a:off x="2563668" y="4221018"/>
-            <a:ext cx="1148086" cy="2134870"/>
-          </a:xfrm>
-          <a:prstGeom prst="rect">
-            <a:avLst/>
-          </a:prstGeom>
-        </p:spPr>
-      </p:pic>
-      <p:pic>
-        <p:nvPicPr>
-          <p:cNvPr id="3" name="図 2">
-            <a:extLst>
-              <a:ext uri="{FF2B5EF4-FFF2-40B4-BE49-F238E27FC236}">
-                <a16:creationId xmlns:a16="http://schemas.microsoft.com/office/drawing/2014/main" id="{0D25D743-5E95-784E-B686-9A55F8BDE33F}"/>
-              </a:ext>
-            </a:extLst>
-          </p:cNvPr>
-          <p:cNvPicPr>
-            <a:picLocks noChangeAspect="1"/>
-          </p:cNvPicPr>
-          <p:nvPr/>
-        </p:nvPicPr>
-        <p:blipFill>
-          <a:blip r:embed="rId3"/>
-          <a:stretch>
-            <a:fillRect/>
-          </a:stretch>
-        </p:blipFill>
-        <p:spPr>
-          <a:xfrm>
-            <a:off x="2033503" y="1076038"/>
-            <a:ext cx="2134870" cy="2134870"/>
-          </a:xfrm>
-          <a:prstGeom prst="rect">
-            <a:avLst/>
-          </a:prstGeom>
-        </p:spPr>
-      </p:pic>
-      <p:sp>
-        <p:nvSpPr>
-          <p:cNvPr id="4" name="正方形/長方形 3">
-            <a:extLst>
-              <a:ext uri="{FF2B5EF4-FFF2-40B4-BE49-F238E27FC236}">
-                <a16:creationId xmlns:a16="http://schemas.microsoft.com/office/drawing/2014/main" id="{88E00B42-1821-9448-80E0-53138E038651}"/>
-              </a:ext>
-            </a:extLst>
-          </p:cNvPr>
-          <p:cNvSpPr/>
-          <p:nvPr/>
-        </p:nvSpPr>
-        <p:spPr>
-          <a:xfrm>
-            <a:off x="339900" y="1163782"/>
-            <a:ext cx="942106" cy="1884212"/>
-          </a:xfrm>
-          <a:prstGeom prst="rect">
-            <a:avLst/>
-          </a:prstGeom>
-        </p:spPr>
-        <p:style>
-          <a:lnRef idx="2">
-            <a:schemeClr val="accent1">
-              <a:shade val="50000"/>
-            </a:schemeClr>
-          </a:lnRef>
-          <a:fillRef idx="1">
-            <a:schemeClr val="accent1"/>
-          </a:fillRef>
-          <a:effectRef idx="0">
-            <a:schemeClr val="accent1"/>
-          </a:effectRef>
-          <a:fontRef idx="minor">
-            <a:schemeClr val="lt1"/>
-          </a:fontRef>
-        </p:style>
-        <p:txBody>
-          <a:bodyPr rtlCol="0" anchor="ctr"/>
-          <a:lstStyle/>
-          <a:p>
-            <a:pPr algn="ctr"/>
-            <a:endParaRPr kumimoji="1" lang="ja-JP" altLang="en-US"/>
-          </a:p>
-        </p:txBody>
-      </p:sp>
-      <p:sp>
-        <p:nvSpPr>
-          <p:cNvPr id="5" name="正方形/長方形 4">
-            <a:extLst>
-              <a:ext uri="{FF2B5EF4-FFF2-40B4-BE49-F238E27FC236}">
-                <a16:creationId xmlns:a16="http://schemas.microsoft.com/office/drawing/2014/main" id="{D5DCAE97-CB96-8E42-944F-DF15887407A2}"/>
-              </a:ext>
-            </a:extLst>
-          </p:cNvPr>
-          <p:cNvSpPr/>
-          <p:nvPr/>
-        </p:nvSpPr>
-        <p:spPr>
-          <a:xfrm>
-            <a:off x="4918364" y="2479964"/>
-            <a:ext cx="942106" cy="471053"/>
-          </a:xfrm>
-          <a:prstGeom prst="rect">
-            <a:avLst/>
-          </a:prstGeom>
-        </p:spPr>
-        <p:style>
-          <a:lnRef idx="2">
-            <a:schemeClr val="accent1">
-              <a:shade val="50000"/>
-            </a:schemeClr>
-          </a:lnRef>
-          <a:fillRef idx="1">
-            <a:schemeClr val="accent1"/>
-          </a:fillRef>
-          <a:effectRef idx="0">
-            <a:schemeClr val="accent1"/>
-          </a:effectRef>
-          <a:fontRef idx="minor">
-            <a:schemeClr val="lt1"/>
-          </a:fontRef>
-        </p:style>
-        <p:txBody>
-          <a:bodyPr rtlCol="0" anchor="ctr"/>
-          <a:lstStyle/>
-          <a:p>
-            <a:pPr algn="ctr"/>
-            <a:endParaRPr kumimoji="1" lang="ja-JP" altLang="en-US"/>
-          </a:p>
-        </p:txBody>
-      </p:sp>
-      <p:sp>
-        <p:nvSpPr>
-          <p:cNvPr id="6" name="正方形/長方形 5">
-            <a:extLst>
-              <a:ext uri="{FF2B5EF4-FFF2-40B4-BE49-F238E27FC236}">
-                <a16:creationId xmlns:a16="http://schemas.microsoft.com/office/drawing/2014/main" id="{A3F4E5B1-7B58-4E4F-9515-2102D51E45F7}"/>
-              </a:ext>
-            </a:extLst>
-          </p:cNvPr>
-          <p:cNvSpPr/>
-          <p:nvPr/>
-        </p:nvSpPr>
-        <p:spPr>
-          <a:xfrm>
-            <a:off x="6026728" y="2479964"/>
-            <a:ext cx="942106" cy="471053"/>
-          </a:xfrm>
-          <a:prstGeom prst="rect">
-            <a:avLst/>
-          </a:prstGeom>
-        </p:spPr>
-        <p:style>
-          <a:lnRef idx="2">
-            <a:schemeClr val="accent1">
-              <a:shade val="50000"/>
-            </a:schemeClr>
-          </a:lnRef>
-          <a:fillRef idx="1">
-            <a:schemeClr val="accent1"/>
-          </a:fillRef>
-          <a:effectRef idx="0">
-            <a:schemeClr val="accent1"/>
-          </a:effectRef>
-          <a:fontRef idx="minor">
-            <a:schemeClr val="lt1"/>
-          </a:fontRef>
-        </p:style>
-        <p:txBody>
-          <a:bodyPr rtlCol="0" anchor="ctr"/>
-          <a:lstStyle/>
-          <a:p>
-            <a:pPr algn="ctr"/>
-            <a:endParaRPr kumimoji="1" lang="ja-JP" altLang="en-US"/>
-          </a:p>
-        </p:txBody>
-      </p:sp>
-      <p:sp>
-        <p:nvSpPr>
-          <p:cNvPr id="7" name="正方形/長方形 6">
-            <a:extLst>
-              <a:ext uri="{FF2B5EF4-FFF2-40B4-BE49-F238E27FC236}">
-                <a16:creationId xmlns:a16="http://schemas.microsoft.com/office/drawing/2014/main" id="{5071F583-E1BE-D448-AE44-180180A16B5B}"/>
-              </a:ext>
-            </a:extLst>
-          </p:cNvPr>
-          <p:cNvSpPr/>
-          <p:nvPr/>
-        </p:nvSpPr>
-        <p:spPr>
-          <a:xfrm>
-            <a:off x="7135092" y="2479964"/>
-            <a:ext cx="942106" cy="471053"/>
-          </a:xfrm>
-          <a:prstGeom prst="rect">
-            <a:avLst/>
-          </a:prstGeom>
-        </p:spPr>
-        <p:style>
-          <a:lnRef idx="2">
-            <a:schemeClr val="accent1">
-              <a:shade val="50000"/>
-            </a:schemeClr>
-          </a:lnRef>
-          <a:fillRef idx="1">
-            <a:schemeClr val="accent1"/>
-          </a:fillRef>
-          <a:effectRef idx="0">
-            <a:schemeClr val="accent1"/>
-          </a:effectRef>
-          <a:fontRef idx="minor">
-            <a:schemeClr val="lt1"/>
-          </a:fontRef>
-        </p:style>
-        <p:txBody>
-          <a:bodyPr rtlCol="0" anchor="ctr"/>
-          <a:lstStyle/>
-          <a:p>
-            <a:pPr algn="ctr"/>
-            <a:endParaRPr kumimoji="1" lang="ja-JP" altLang="en-US"/>
-          </a:p>
-        </p:txBody>
-      </p:sp>
-      <p:sp>
-        <p:nvSpPr>
-          <p:cNvPr id="8" name="正方形/長方形 7">
-            <a:extLst>
-              <a:ext uri="{FF2B5EF4-FFF2-40B4-BE49-F238E27FC236}">
-                <a16:creationId xmlns:a16="http://schemas.microsoft.com/office/drawing/2014/main" id="{F5CEF7FC-65F1-A34D-B7B8-8B693DA1585A}"/>
-              </a:ext>
-            </a:extLst>
-          </p:cNvPr>
-          <p:cNvSpPr/>
-          <p:nvPr/>
-        </p:nvSpPr>
-        <p:spPr>
-          <a:xfrm>
-            <a:off x="8243456" y="2479964"/>
-            <a:ext cx="942106" cy="471053"/>
-          </a:xfrm>
-          <a:prstGeom prst="rect">
-            <a:avLst/>
-          </a:prstGeom>
-        </p:spPr>
-        <p:style>
-          <a:lnRef idx="2">
-            <a:schemeClr val="accent1">
-              <a:shade val="50000"/>
-            </a:schemeClr>
-          </a:lnRef>
-          <a:fillRef idx="1">
-            <a:schemeClr val="accent1"/>
-          </a:fillRef>
-          <a:effectRef idx="0">
-            <a:schemeClr val="accent1"/>
-          </a:effectRef>
-          <a:fontRef idx="minor">
-            <a:schemeClr val="lt1"/>
-          </a:fontRef>
-        </p:style>
-        <p:txBody>
-          <a:bodyPr rtlCol="0" anchor="ctr"/>
-          <a:lstStyle/>
-          <a:p>
-            <a:pPr algn="ctr"/>
-            <a:endParaRPr kumimoji="1" lang="ja-JP" altLang="en-US"/>
-          </a:p>
-        </p:txBody>
-      </p:sp>
       <p:sp>
         <p:nvSpPr>
           <p:cNvPr id="9" name="テキスト ボックス 8">
@@ -2566,8 +2292,8 @@
         </p:nvSpPr>
         <p:spPr>
           <a:xfrm>
-            <a:off x="3034144" y="152399"/>
-            <a:ext cx="3570208" cy="461665"/>
+            <a:off x="3571495" y="131057"/>
+            <a:ext cx="2112739" cy="461665"/>
           </a:xfrm>
           <a:prstGeom prst="rect">
             <a:avLst/>
@@ -2585,7 +2311,7 @@
           <a:bodyPr wrap="square" rtlCol="0"/>
           <a:lstStyle/>
           <a:p>
-            <a:pPr>
+            <a:pPr algn="ctr">
               <a:defRPr sz="2300"/>
             </a:pPr>
             <a:r>
@@ -2609,8 +2335,8 @@
         </p:nvSpPr>
         <p:spPr>
           <a:xfrm>
-            <a:off x="3214254" y="3311235"/>
-            <a:ext cx="3262432" cy="461665"/>
+            <a:off x="3625961" y="3289893"/>
+            <a:ext cx="1930607" cy="461665"/>
           </a:xfrm>
           <a:prstGeom prst="rect">
             <a:avLst/>
@@ -2628,7 +2354,7 @@
           <a:bodyPr wrap="square" rtlCol="0"/>
           <a:lstStyle/>
           <a:p>
-            <a:pPr>
+            <a:pPr algn="ctr">
               <a:defRPr sz="2300"/>
             </a:pPr>
             <a:r>
@@ -2638,110 +2364,464 @@
           </a:p>
         </p:txBody>
       </p:sp>
-      <p:sp>
-        <p:nvSpPr>
-          <p:cNvPr id="11" name="右矢印 10">
+      <p:grpSp>
+        <p:nvGrpSpPr>
+          <p:cNvPr id="40" name="グループ化 39">
             <a:extLst>
               <a:ext uri="{FF2B5EF4-FFF2-40B4-BE49-F238E27FC236}">
-                <a16:creationId xmlns:a16="http://schemas.microsoft.com/office/drawing/2014/main" id="{69629DBD-888F-ED41-B876-758AC22BCC52}"/>
+                <a16:creationId xmlns:a16="http://schemas.microsoft.com/office/drawing/2014/main" id="{D6A667D9-F8BD-7499-4CF4-A8FA533637AE}"/>
               </a:ext>
             </a:extLst>
           </p:cNvPr>
-          <p:cNvSpPr/>
+          <p:cNvGrpSpPr/>
           <p:nvPr/>
-        </p:nvSpPr>
-        <p:spPr>
+        </p:nvGrpSpPr>
+        <p:grpSpPr>
           <a:xfrm>
-            <a:off x="1565564" y="1787236"/>
-            <a:ext cx="554181" cy="554182"/>
+            <a:off x="2358099" y="1505188"/>
+            <a:ext cx="5179252" cy="1640088"/>
+            <a:chOff x="2809188" y="1211466"/>
+            <a:chExt cx="6385122" cy="2021944"/>
           </a:xfrm>
-          <a:prstGeom prst="rightArrow">
-            <a:avLst/>
-          </a:prstGeom>
-          <a:solidFill>
-            <a:srgbClr val="FF0000"/>
-          </a:solidFill>
-        </p:spPr>
-        <p:style>
-          <a:lnRef idx="2">
-            <a:schemeClr val="accent1">
-              <a:shade val="50000"/>
-            </a:schemeClr>
-          </a:lnRef>
-          <a:fillRef idx="1">
-            <a:schemeClr val="accent1"/>
-          </a:fillRef>
-          <a:effectRef idx="0">
-            <a:schemeClr val="accent1"/>
-          </a:effectRef>
-          <a:fontRef idx="minor">
-            <a:schemeClr val="lt1"/>
-          </a:fontRef>
-        </p:style>
-        <p:txBody>
-          <a:bodyPr rtlCol="0" anchor="ctr"/>
-          <a:lstStyle/>
-          <a:p>
-            <a:pPr algn="ctr"/>
-            <a:endParaRPr kumimoji="1" lang="ja-JP" altLang="en-US"/>
-          </a:p>
-        </p:txBody>
-      </p:sp>
+        </p:grpSpPr>
+        <p:sp>
+          <p:nvSpPr>
+            <p:cNvPr id="4" name="正方形/長方形 3">
+              <a:extLst>
+                <a:ext uri="{FF2B5EF4-FFF2-40B4-BE49-F238E27FC236}">
+                  <a16:creationId xmlns:a16="http://schemas.microsoft.com/office/drawing/2014/main" id="{88E00B42-1821-9448-80E0-53138E038651}"/>
+                </a:ext>
+              </a:extLst>
+            </p:cNvPr>
+            <p:cNvSpPr/>
+            <p:nvPr/>
+          </p:nvSpPr>
+          <p:spPr>
+            <a:xfrm>
+              <a:off x="2809188" y="1211466"/>
+              <a:ext cx="942106" cy="1884212"/>
+            </a:xfrm>
+            <a:prstGeom prst="rect">
+              <a:avLst/>
+            </a:prstGeom>
+          </p:spPr>
+          <p:style>
+            <a:lnRef idx="2">
+              <a:schemeClr val="accent1">
+                <a:shade val="50000"/>
+              </a:schemeClr>
+            </a:lnRef>
+            <a:fillRef idx="1">
+              <a:schemeClr val="accent1"/>
+            </a:fillRef>
+            <a:effectRef idx="0">
+              <a:schemeClr val="accent1"/>
+            </a:effectRef>
+            <a:fontRef idx="minor">
+              <a:schemeClr val="lt1"/>
+            </a:fontRef>
+          </p:style>
+          <p:txBody>
+            <a:bodyPr rtlCol="0" anchor="ctr"/>
+            <a:lstStyle/>
+            <a:p>
+              <a:pPr algn="ctr"/>
+              <a:endParaRPr kumimoji="1" lang="ja-JP" altLang="en-US"/>
+            </a:p>
+          </p:txBody>
+        </p:sp>
+        <p:sp>
+          <p:nvSpPr>
+            <p:cNvPr id="5" name="正方形/長方形 4">
+              <a:extLst>
+                <a:ext uri="{FF2B5EF4-FFF2-40B4-BE49-F238E27FC236}">
+                  <a16:creationId xmlns:a16="http://schemas.microsoft.com/office/drawing/2014/main" id="{D5DCAE97-CB96-8E42-944F-DF15887407A2}"/>
+                </a:ext>
+              </a:extLst>
+            </p:cNvPr>
+            <p:cNvSpPr/>
+            <p:nvPr/>
+          </p:nvSpPr>
+          <p:spPr>
+            <a:xfrm>
+              <a:off x="4918364" y="2479964"/>
+              <a:ext cx="942106" cy="471053"/>
+            </a:xfrm>
+            <a:prstGeom prst="rect">
+              <a:avLst/>
+            </a:prstGeom>
+          </p:spPr>
+          <p:style>
+            <a:lnRef idx="2">
+              <a:schemeClr val="accent1">
+                <a:shade val="50000"/>
+              </a:schemeClr>
+            </a:lnRef>
+            <a:fillRef idx="1">
+              <a:schemeClr val="accent1"/>
+            </a:fillRef>
+            <a:effectRef idx="0">
+              <a:schemeClr val="accent1"/>
+            </a:effectRef>
+            <a:fontRef idx="minor">
+              <a:schemeClr val="lt1"/>
+            </a:fontRef>
+          </p:style>
+          <p:txBody>
+            <a:bodyPr rtlCol="0" anchor="ctr"/>
+            <a:lstStyle/>
+            <a:p>
+              <a:pPr algn="ctr"/>
+              <a:endParaRPr kumimoji="1" lang="ja-JP" altLang="en-US"/>
+            </a:p>
+          </p:txBody>
+        </p:sp>
+        <p:sp>
+          <p:nvSpPr>
+            <p:cNvPr id="6" name="正方形/長方形 5">
+              <a:extLst>
+                <a:ext uri="{FF2B5EF4-FFF2-40B4-BE49-F238E27FC236}">
+                  <a16:creationId xmlns:a16="http://schemas.microsoft.com/office/drawing/2014/main" id="{A3F4E5B1-7B58-4E4F-9515-2102D51E45F7}"/>
+                </a:ext>
+              </a:extLst>
+            </p:cNvPr>
+            <p:cNvSpPr/>
+            <p:nvPr/>
+          </p:nvSpPr>
+          <p:spPr>
+            <a:xfrm>
+              <a:off x="6035476" y="2479964"/>
+              <a:ext cx="942106" cy="471053"/>
+            </a:xfrm>
+            <a:prstGeom prst="rect">
+              <a:avLst/>
+            </a:prstGeom>
+          </p:spPr>
+          <p:style>
+            <a:lnRef idx="2">
+              <a:schemeClr val="accent1">
+                <a:shade val="50000"/>
+              </a:schemeClr>
+            </a:lnRef>
+            <a:fillRef idx="1">
+              <a:schemeClr val="accent1"/>
+            </a:fillRef>
+            <a:effectRef idx="0">
+              <a:schemeClr val="accent1"/>
+            </a:effectRef>
+            <a:fontRef idx="minor">
+              <a:schemeClr val="lt1"/>
+            </a:fontRef>
+          </p:style>
+          <p:txBody>
+            <a:bodyPr rtlCol="0" anchor="ctr"/>
+            <a:lstStyle/>
+            <a:p>
+              <a:pPr algn="ctr"/>
+              <a:endParaRPr kumimoji="1" lang="ja-JP" altLang="en-US"/>
+            </a:p>
+          </p:txBody>
+        </p:sp>
+        <p:sp>
+          <p:nvSpPr>
+            <p:cNvPr id="7" name="正方形/長方形 6">
+              <a:extLst>
+                <a:ext uri="{FF2B5EF4-FFF2-40B4-BE49-F238E27FC236}">
+                  <a16:creationId xmlns:a16="http://schemas.microsoft.com/office/drawing/2014/main" id="{5071F583-E1BE-D448-AE44-180180A16B5B}"/>
+                </a:ext>
+              </a:extLst>
+            </p:cNvPr>
+            <p:cNvSpPr/>
+            <p:nvPr/>
+          </p:nvSpPr>
+          <p:spPr>
+            <a:xfrm>
+              <a:off x="7135092" y="2479964"/>
+              <a:ext cx="942106" cy="471053"/>
+            </a:xfrm>
+            <a:prstGeom prst="rect">
+              <a:avLst/>
+            </a:prstGeom>
+          </p:spPr>
+          <p:style>
+            <a:lnRef idx="2">
+              <a:schemeClr val="accent1">
+                <a:shade val="50000"/>
+              </a:schemeClr>
+            </a:lnRef>
+            <a:fillRef idx="1">
+              <a:schemeClr val="accent1"/>
+            </a:fillRef>
+            <a:effectRef idx="0">
+              <a:schemeClr val="accent1"/>
+            </a:effectRef>
+            <a:fontRef idx="minor">
+              <a:schemeClr val="lt1"/>
+            </a:fontRef>
+          </p:style>
+          <p:txBody>
+            <a:bodyPr rtlCol="0" anchor="ctr"/>
+            <a:lstStyle/>
+            <a:p>
+              <a:pPr algn="ctr"/>
+              <a:endParaRPr kumimoji="1" lang="ja-JP" altLang="en-US"/>
+            </a:p>
+          </p:txBody>
+        </p:sp>
+        <p:sp>
+          <p:nvSpPr>
+            <p:cNvPr id="8" name="正方形/長方形 7">
+              <a:extLst>
+                <a:ext uri="{FF2B5EF4-FFF2-40B4-BE49-F238E27FC236}">
+                  <a16:creationId xmlns:a16="http://schemas.microsoft.com/office/drawing/2014/main" id="{F5CEF7FC-65F1-A34D-B7B8-8B693DA1585A}"/>
+                </a:ext>
+              </a:extLst>
+            </p:cNvPr>
+            <p:cNvSpPr/>
+            <p:nvPr/>
+          </p:nvSpPr>
+          <p:spPr>
+            <a:xfrm>
+              <a:off x="8252204" y="2479964"/>
+              <a:ext cx="942106" cy="471053"/>
+            </a:xfrm>
+            <a:prstGeom prst="rect">
+              <a:avLst/>
+            </a:prstGeom>
+          </p:spPr>
+          <p:style>
+            <a:lnRef idx="2">
+              <a:schemeClr val="accent1">
+                <a:shade val="50000"/>
+              </a:schemeClr>
+            </a:lnRef>
+            <a:fillRef idx="1">
+              <a:schemeClr val="accent1"/>
+            </a:fillRef>
+            <a:effectRef idx="0">
+              <a:schemeClr val="accent1"/>
+            </a:effectRef>
+            <a:fontRef idx="minor">
+              <a:schemeClr val="lt1"/>
+            </a:fontRef>
+          </p:style>
+          <p:txBody>
+            <a:bodyPr rtlCol="0" anchor="ctr"/>
+            <a:lstStyle/>
+            <a:p>
+              <a:pPr algn="ctr"/>
+              <a:endParaRPr kumimoji="1" lang="ja-JP" altLang="en-US"/>
+            </a:p>
+          </p:txBody>
+        </p:sp>
+        <p:sp>
+          <p:nvSpPr>
+            <p:cNvPr id="12" name="右矢印 11">
+              <a:extLst>
+                <a:ext uri="{FF2B5EF4-FFF2-40B4-BE49-F238E27FC236}">
+                  <a16:creationId xmlns:a16="http://schemas.microsoft.com/office/drawing/2014/main" id="{7830C8E8-2D7D-CB4C-9F8E-A961292975AC}"/>
+                </a:ext>
+              </a:extLst>
+            </p:cNvPr>
+            <p:cNvSpPr/>
+            <p:nvPr/>
+          </p:nvSpPr>
+          <p:spPr>
+            <a:xfrm>
+              <a:off x="4170218" y="1759527"/>
+              <a:ext cx="554181" cy="554182"/>
+            </a:xfrm>
+            <a:prstGeom prst="rightArrow">
+              <a:avLst/>
+            </a:prstGeom>
+            <a:solidFill>
+              <a:srgbClr val="FF0000"/>
+            </a:solidFill>
+          </p:spPr>
+          <p:style>
+            <a:lnRef idx="2">
+              <a:schemeClr val="accent1">
+                <a:shade val="50000"/>
+              </a:schemeClr>
+            </a:lnRef>
+            <a:fillRef idx="1">
+              <a:schemeClr val="accent1"/>
+            </a:fillRef>
+            <a:effectRef idx="0">
+              <a:schemeClr val="accent1"/>
+            </a:effectRef>
+            <a:fontRef idx="minor">
+              <a:schemeClr val="lt1"/>
+            </a:fontRef>
+          </p:style>
+          <p:txBody>
+            <a:bodyPr rtlCol="0" anchor="ctr"/>
+            <a:lstStyle/>
+            <a:p>
+              <a:pPr algn="ctr"/>
+              <a:endParaRPr kumimoji="1" lang="ja-JP" altLang="en-US"/>
+            </a:p>
+          </p:txBody>
+        </p:sp>
+        <p:sp>
+          <p:nvSpPr>
+            <p:cNvPr id="24" name="テキスト ボックス 23">
+              <a:extLst>
+                <a:ext uri="{FF2B5EF4-FFF2-40B4-BE49-F238E27FC236}">
+                  <a16:creationId xmlns:a16="http://schemas.microsoft.com/office/drawing/2014/main" id="{142E7465-C6D6-4C46-8B46-6ADB5ABC80A6}"/>
+                </a:ext>
+              </a:extLst>
+            </p:cNvPr>
+            <p:cNvSpPr txBox="1"/>
+            <p:nvPr/>
+          </p:nvSpPr>
+          <p:spPr>
+            <a:xfrm>
+              <a:off x="4978888" y="2971800"/>
+              <a:ext cx="821059" cy="261610"/>
+            </a:xfrm>
+            <a:prstGeom prst="rect">
+              <a:avLst/>
+            </a:prstGeom>
+            <a:noFill/>
+          </p:spPr>
+          <p:txBody>
+            <a:bodyPr wrap="none" rtlCol="0">
+              <a:spAutoFit/>
+            </a:bodyPr>
+            <a:lstStyle/>
+            <a:p>
+              <a:pPr>
+                <a:defRPr/>
+              </a:pPr>
+              <a:r>
+                <a:rPr kumimoji="1" lang="ja-JP" altLang="en-US" sz="1100"/>
+                <a:t>Process 1</a:t>
+              </a:r>
+            </a:p>
+          </p:txBody>
+        </p:sp>
+        <p:sp>
+          <p:nvSpPr>
+            <p:cNvPr id="25" name="テキスト ボックス 24">
+              <a:extLst>
+                <a:ext uri="{FF2B5EF4-FFF2-40B4-BE49-F238E27FC236}">
+                  <a16:creationId xmlns:a16="http://schemas.microsoft.com/office/drawing/2014/main" id="{C87403A7-5F83-8E4F-AC1F-7D2C3C38FF31}"/>
+                </a:ext>
+              </a:extLst>
+            </p:cNvPr>
+            <p:cNvSpPr txBox="1"/>
+            <p:nvPr/>
+          </p:nvSpPr>
+          <p:spPr>
+            <a:xfrm>
+              <a:off x="6096000" y="2971800"/>
+              <a:ext cx="821059" cy="261610"/>
+            </a:xfrm>
+            <a:prstGeom prst="rect">
+              <a:avLst/>
+            </a:prstGeom>
+            <a:noFill/>
+          </p:spPr>
+          <p:txBody>
+            <a:bodyPr wrap="none" rtlCol="0">
+              <a:spAutoFit/>
+            </a:bodyPr>
+            <a:lstStyle/>
+            <a:p>
+              <a:pPr>
+                <a:defRPr/>
+              </a:pPr>
+              <a:r>
+                <a:rPr kumimoji="1" lang="ja-JP" altLang="en-US" sz="1100"/>
+                <a:t>Process 2</a:t>
+              </a:r>
+            </a:p>
+          </p:txBody>
+        </p:sp>
+        <p:sp>
+          <p:nvSpPr>
+            <p:cNvPr id="26" name="テキスト ボックス 25">
+              <a:extLst>
+                <a:ext uri="{FF2B5EF4-FFF2-40B4-BE49-F238E27FC236}">
+                  <a16:creationId xmlns:a16="http://schemas.microsoft.com/office/drawing/2014/main" id="{1FF5385A-F508-424C-B939-6F70C723E6BC}"/>
+                </a:ext>
+              </a:extLst>
+            </p:cNvPr>
+            <p:cNvSpPr txBox="1"/>
+            <p:nvPr/>
+          </p:nvSpPr>
+          <p:spPr>
+            <a:xfrm>
+              <a:off x="7195616" y="2971800"/>
+              <a:ext cx="821059" cy="261610"/>
+            </a:xfrm>
+            <a:prstGeom prst="rect">
+              <a:avLst/>
+            </a:prstGeom>
+            <a:noFill/>
+          </p:spPr>
+          <p:txBody>
+            <a:bodyPr wrap="none" rtlCol="0">
+              <a:spAutoFit/>
+            </a:bodyPr>
+            <a:lstStyle/>
+            <a:p>
+              <a:pPr>
+                <a:defRPr/>
+              </a:pPr>
+              <a:r>
+                <a:rPr kumimoji="1" lang="ja-JP" altLang="en-US" sz="1100"/>
+                <a:t>Process 3</a:t>
+              </a:r>
+            </a:p>
+          </p:txBody>
+        </p:sp>
+        <p:sp>
+          <p:nvSpPr>
+            <p:cNvPr id="27" name="テキスト ボックス 26">
+              <a:extLst>
+                <a:ext uri="{FF2B5EF4-FFF2-40B4-BE49-F238E27FC236}">
+                  <a16:creationId xmlns:a16="http://schemas.microsoft.com/office/drawing/2014/main" id="{502DDAC4-61D5-F04F-B806-F96E4370B8B2}"/>
+                </a:ext>
+              </a:extLst>
+            </p:cNvPr>
+            <p:cNvSpPr txBox="1"/>
+            <p:nvPr/>
+          </p:nvSpPr>
+          <p:spPr>
+            <a:xfrm>
+              <a:off x="8312728" y="2971800"/>
+              <a:ext cx="821059" cy="261610"/>
+            </a:xfrm>
+            <a:prstGeom prst="rect">
+              <a:avLst/>
+            </a:prstGeom>
+            <a:noFill/>
+          </p:spPr>
+          <p:txBody>
+            <a:bodyPr wrap="none" rtlCol="0">
+              <a:spAutoFit/>
+            </a:bodyPr>
+            <a:lstStyle/>
+            <a:p>
+              <a:pPr>
+                <a:defRPr/>
+              </a:pPr>
+              <a:r>
+                <a:rPr kumimoji="1" lang="ja-JP" altLang="en-US" sz="1100"/>
+                <a:t>Process 4</a:t>
+              </a:r>
+            </a:p>
+          </p:txBody>
+        </p:sp>
+      </p:grpSp>
       <p:sp>
         <p:nvSpPr>
-          <p:cNvPr id="12" name="右矢印 11">
+          <p:cNvPr id="33" name="テキスト ボックス 32">
             <a:extLst>
               <a:ext uri="{FF2B5EF4-FFF2-40B4-BE49-F238E27FC236}">
-                <a16:creationId xmlns:a16="http://schemas.microsoft.com/office/drawing/2014/main" id="{7830C8E8-2D7D-CB4C-9F8E-A961292975AC}"/>
-              </a:ext>
-            </a:extLst>
-          </p:cNvPr>
-          <p:cNvSpPr/>
-          <p:nvPr/>
-        </p:nvSpPr>
-        <p:spPr>
-          <a:xfrm>
-            <a:off x="4170218" y="1759527"/>
-            <a:ext cx="554181" cy="554182"/>
-          </a:xfrm>
-          <a:prstGeom prst="rightArrow">
-            <a:avLst/>
-          </a:prstGeom>
-          <a:solidFill>
-            <a:srgbClr val="FF0000"/>
-          </a:solidFill>
-        </p:spPr>
-        <p:style>
-          <a:lnRef idx="2">
-            <a:schemeClr val="accent1">
-              <a:shade val="50000"/>
-            </a:schemeClr>
-          </a:lnRef>
-          <a:fillRef idx="1">
-            <a:schemeClr val="accent1"/>
-          </a:fillRef>
-          <a:effectRef idx="0">
-            <a:schemeClr val="accent1"/>
-          </a:effectRef>
-          <a:fontRef idx="minor">
-            <a:schemeClr val="lt1"/>
-          </a:fontRef>
-        </p:style>
-        <p:txBody>
-          <a:bodyPr rtlCol="0" anchor="ctr"/>
-          <a:lstStyle/>
-          <a:p>
-            <a:pPr algn="ctr"/>
-            <a:endParaRPr kumimoji="1" lang="ja-JP" altLang="en-US"/>
-          </a:p>
-        </p:txBody>
-      </p:sp>
-      <p:sp>
-        <p:nvSpPr>
-          <p:cNvPr id="13" name="テキスト ボックス 12">
-            <a:extLst>
-              <a:ext uri="{FF2B5EF4-FFF2-40B4-BE49-F238E27FC236}">
-                <a16:creationId xmlns:a16="http://schemas.microsoft.com/office/drawing/2014/main" id="{403BDF19-2955-C346-AE1B-9491FC3CB16B}"/>
+                <a16:creationId xmlns:a16="http://schemas.microsoft.com/office/drawing/2014/main" id="{264D950B-5BB6-4CC2-1BFA-23A14CFC2969}"/>
               </a:ext>
             </a:extLst>
           </p:cNvPr>
@@ -2750,8 +2830,8 @@
         </p:nvSpPr>
         <p:spPr>
           <a:xfrm>
-            <a:off x="997528" y="678873"/>
-            <a:ext cx="7571303" cy="369332"/>
+            <a:off x="810953" y="3793223"/>
+            <a:ext cx="8716862" cy="369332"/>
           </a:xfrm>
           <a:prstGeom prst="rect">
             <a:avLst/>
@@ -2759,27 +2839,24 @@
           <a:noFill/>
         </p:spPr>
         <p:txBody>
-          <a:bodyPr wrap="square" rtlCol="0">
-            <a:normAutofit/>
+          <a:bodyPr wrap="square">
+            <a:spAutoFit/>
           </a:bodyPr>
           <a:lstStyle/>
           <a:p>
-            <a:pPr>
-              <a:defRPr/>
-            </a:pPr>
             <a:r>
-              <a:rPr kumimoji="1" lang="ja-JP" altLang="en-US"/>
-              <a:t>Keep the total amount of computation fixed, increase parallelism, and reduce execution time</a:t>
+              <a:rPr lang="ja-JP" altLang="en-US"/>
+              <a:t>Keep computation per parallel unit fixed, increase parallelism, and increase the total size</a:t>
             </a:r>
           </a:p>
         </p:txBody>
       </p:sp>
       <p:sp>
         <p:nvSpPr>
-          <p:cNvPr id="14" name="テキスト ボックス 13">
+          <p:cNvPr id="35" name="テキスト ボックス 34">
             <a:extLst>
               <a:ext uri="{FF2B5EF4-FFF2-40B4-BE49-F238E27FC236}">
-                <a16:creationId xmlns:a16="http://schemas.microsoft.com/office/drawing/2014/main" id="{51DDFB41-EB3D-6941-B881-AF03DD1B2BFB}"/>
+                <a16:creationId xmlns:a16="http://schemas.microsoft.com/office/drawing/2014/main" id="{4D473458-BF84-395B-2F8F-EF32B5A04F14}"/>
               </a:ext>
             </a:extLst>
           </p:cNvPr>
@@ -2788,8 +2865,8 @@
         </p:nvSpPr>
         <p:spPr>
           <a:xfrm>
-            <a:off x="1136073" y="3810000"/>
-            <a:ext cx="8032968" cy="369332"/>
+            <a:off x="657178" y="614218"/>
+            <a:ext cx="8870637" cy="369332"/>
           </a:xfrm>
           <a:prstGeom prst="rect">
             <a:avLst/>
@@ -2797,353 +2874,476 @@
           <a:noFill/>
         </p:spPr>
         <p:txBody>
-          <a:bodyPr wrap="square" rtlCol="0"/>
+          <a:bodyPr wrap="square">
+            <a:spAutoFit/>
+          </a:bodyPr>
           <a:lstStyle/>
           <a:p>
-            <a:pPr>
-              <a:defRPr sz="1300"/>
-            </a:pPr>
             <a:r>
-              <a:rPr kumimoji="1" lang="ja-JP" altLang="en-US" sz="1300"/>
-              <a:t>Keep computation per parallel unit fixed, increase parallelism, and increase the total size</a:t>
+              <a:rPr lang="ja-JP" altLang="en-US"/>
+              <a:t>Keep the total amount of computation fixed, increase parallelism, and reduce execution time</a:t>
             </a:r>
           </a:p>
         </p:txBody>
       </p:sp>
-      <p:sp>
-        <p:nvSpPr>
-          <p:cNvPr id="15" name="正方形/長方形 14">
+      <p:grpSp>
+        <p:nvGrpSpPr>
+          <p:cNvPr id="41" name="グループ化 40">
             <a:extLst>
               <a:ext uri="{FF2B5EF4-FFF2-40B4-BE49-F238E27FC236}">
-                <a16:creationId xmlns:a16="http://schemas.microsoft.com/office/drawing/2014/main" id="{EEFAB6BD-2BE3-2E49-A650-7B9C667EED7D}"/>
+                <a16:creationId xmlns:a16="http://schemas.microsoft.com/office/drawing/2014/main" id="{E3692EA1-6241-FF67-56AB-56310E3ABD3D}"/>
               </a:ext>
             </a:extLst>
           </p:cNvPr>
-          <p:cNvSpPr/>
+          <p:cNvGrpSpPr/>
           <p:nvPr/>
-        </p:nvSpPr>
-        <p:spPr>
+        </p:nvGrpSpPr>
+        <p:grpSpPr>
           <a:xfrm>
-            <a:off x="339900" y="4281055"/>
-            <a:ext cx="942106" cy="1884212"/>
+            <a:off x="2377297" y="4612526"/>
+            <a:ext cx="5231296" cy="1743809"/>
+            <a:chOff x="2826797" y="4281055"/>
+            <a:chExt cx="6449283" cy="2149815"/>
           </a:xfrm>
-          <a:prstGeom prst="rect">
-            <a:avLst/>
-          </a:prstGeom>
-        </p:spPr>
-        <p:style>
-          <a:lnRef idx="2">
-            <a:schemeClr val="accent1">
-              <a:shade val="50000"/>
-            </a:schemeClr>
-          </a:lnRef>
-          <a:fillRef idx="1">
-            <a:schemeClr val="accent1"/>
-          </a:fillRef>
-          <a:effectRef idx="0">
-            <a:schemeClr val="accent1"/>
-          </a:effectRef>
-          <a:fontRef idx="minor">
-            <a:schemeClr val="lt1"/>
-          </a:fontRef>
-        </p:style>
-        <p:txBody>
-          <a:bodyPr rtlCol="0" anchor="ctr"/>
-          <a:lstStyle/>
-          <a:p>
-            <a:pPr algn="ctr"/>
-            <a:endParaRPr kumimoji="1" lang="ja-JP" altLang="en-US"/>
-          </a:p>
-        </p:txBody>
-      </p:sp>
+        </p:grpSpPr>
+        <p:sp>
+          <p:nvSpPr>
+            <p:cNvPr id="15" name="正方形/長方形 14">
+              <a:extLst>
+                <a:ext uri="{FF2B5EF4-FFF2-40B4-BE49-F238E27FC236}">
+                  <a16:creationId xmlns:a16="http://schemas.microsoft.com/office/drawing/2014/main" id="{EEFAB6BD-2BE3-2E49-A650-7B9C667EED7D}"/>
+                </a:ext>
+              </a:extLst>
+            </p:cNvPr>
+            <p:cNvSpPr/>
+            <p:nvPr/>
+          </p:nvSpPr>
+          <p:spPr>
+            <a:xfrm>
+              <a:off x="2826797" y="4343477"/>
+              <a:ext cx="942106" cy="1884212"/>
+            </a:xfrm>
+            <a:prstGeom prst="rect">
+              <a:avLst/>
+            </a:prstGeom>
+          </p:spPr>
+          <p:style>
+            <a:lnRef idx="2">
+              <a:schemeClr val="accent1">
+                <a:shade val="50000"/>
+              </a:schemeClr>
+            </a:lnRef>
+            <a:fillRef idx="1">
+              <a:schemeClr val="accent1"/>
+            </a:fillRef>
+            <a:effectRef idx="0">
+              <a:schemeClr val="accent1"/>
+            </a:effectRef>
+            <a:fontRef idx="minor">
+              <a:schemeClr val="lt1"/>
+            </a:fontRef>
+          </p:style>
+          <p:txBody>
+            <a:bodyPr rtlCol="0" anchor="ctr"/>
+            <a:lstStyle/>
+            <a:p>
+              <a:pPr algn="ctr"/>
+              <a:endParaRPr kumimoji="1" lang="ja-JP" altLang="en-US"/>
+            </a:p>
+          </p:txBody>
+        </p:sp>
+        <p:sp>
+          <p:nvSpPr>
+            <p:cNvPr id="17" name="右矢印 16">
+              <a:extLst>
+                <a:ext uri="{FF2B5EF4-FFF2-40B4-BE49-F238E27FC236}">
+                  <a16:creationId xmlns:a16="http://schemas.microsoft.com/office/drawing/2014/main" id="{68B7FB71-3337-5F4B-B07E-C9AE7671D09A}"/>
+                </a:ext>
+              </a:extLst>
+            </p:cNvPr>
+            <p:cNvSpPr/>
+            <p:nvPr/>
+          </p:nvSpPr>
+          <p:spPr>
+            <a:xfrm>
+              <a:off x="4211782" y="4959927"/>
+              <a:ext cx="554181" cy="554182"/>
+            </a:xfrm>
+            <a:prstGeom prst="rightArrow">
+              <a:avLst/>
+            </a:prstGeom>
+            <a:solidFill>
+              <a:srgbClr val="FF0000"/>
+            </a:solidFill>
+          </p:spPr>
+          <p:style>
+            <a:lnRef idx="2">
+              <a:schemeClr val="accent1">
+                <a:shade val="50000"/>
+              </a:schemeClr>
+            </a:lnRef>
+            <a:fillRef idx="1">
+              <a:schemeClr val="accent1"/>
+            </a:fillRef>
+            <a:effectRef idx="0">
+              <a:schemeClr val="accent1"/>
+            </a:effectRef>
+            <a:fontRef idx="minor">
+              <a:schemeClr val="lt1"/>
+            </a:fontRef>
+          </p:style>
+          <p:txBody>
+            <a:bodyPr rtlCol="0" anchor="ctr"/>
+            <a:lstStyle/>
+            <a:p>
+              <a:pPr algn="ctr"/>
+              <a:endParaRPr kumimoji="1" lang="ja-JP" altLang="en-US"/>
+            </a:p>
+          </p:txBody>
+        </p:sp>
+        <p:sp>
+          <p:nvSpPr>
+            <p:cNvPr id="18" name="正方形/長方形 17">
+              <a:extLst>
+                <a:ext uri="{FF2B5EF4-FFF2-40B4-BE49-F238E27FC236}">
+                  <a16:creationId xmlns:a16="http://schemas.microsoft.com/office/drawing/2014/main" id="{67FA7351-D9B2-FA4D-814A-CB0A471DD018}"/>
+                </a:ext>
+              </a:extLst>
+            </p:cNvPr>
+            <p:cNvSpPr/>
+            <p:nvPr/>
+          </p:nvSpPr>
+          <p:spPr>
+            <a:xfrm>
+              <a:off x="4925755" y="4281055"/>
+              <a:ext cx="942106" cy="1884212"/>
+            </a:xfrm>
+            <a:prstGeom prst="rect">
+              <a:avLst/>
+            </a:prstGeom>
+          </p:spPr>
+          <p:style>
+            <a:lnRef idx="2">
+              <a:schemeClr val="accent1">
+                <a:shade val="50000"/>
+              </a:schemeClr>
+            </a:lnRef>
+            <a:fillRef idx="1">
+              <a:schemeClr val="accent1"/>
+            </a:fillRef>
+            <a:effectRef idx="0">
+              <a:schemeClr val="accent1"/>
+            </a:effectRef>
+            <a:fontRef idx="minor">
+              <a:schemeClr val="lt1"/>
+            </a:fontRef>
+          </p:style>
+          <p:txBody>
+            <a:bodyPr rtlCol="0" anchor="ctr"/>
+            <a:lstStyle/>
+            <a:p>
+              <a:pPr algn="ctr"/>
+              <a:endParaRPr kumimoji="1" lang="ja-JP" altLang="en-US"/>
+            </a:p>
+          </p:txBody>
+        </p:sp>
+        <p:sp>
+          <p:nvSpPr>
+            <p:cNvPr id="19" name="正方形/長方形 18">
+              <a:extLst>
+                <a:ext uri="{FF2B5EF4-FFF2-40B4-BE49-F238E27FC236}">
+                  <a16:creationId xmlns:a16="http://schemas.microsoft.com/office/drawing/2014/main" id="{7328A581-972C-4544-8BF0-8C61B4E7F64B}"/>
+                </a:ext>
+              </a:extLst>
+            </p:cNvPr>
+            <p:cNvSpPr/>
+            <p:nvPr/>
+          </p:nvSpPr>
+          <p:spPr>
+            <a:xfrm>
+              <a:off x="6089537" y="4281055"/>
+              <a:ext cx="942106" cy="1884212"/>
+            </a:xfrm>
+            <a:prstGeom prst="rect">
+              <a:avLst/>
+            </a:prstGeom>
+          </p:spPr>
+          <p:style>
+            <a:lnRef idx="2">
+              <a:schemeClr val="accent1">
+                <a:shade val="50000"/>
+              </a:schemeClr>
+            </a:lnRef>
+            <a:fillRef idx="1">
+              <a:schemeClr val="accent1"/>
+            </a:fillRef>
+            <a:effectRef idx="0">
+              <a:schemeClr val="accent1"/>
+            </a:effectRef>
+            <a:fontRef idx="minor">
+              <a:schemeClr val="lt1"/>
+            </a:fontRef>
+          </p:style>
+          <p:txBody>
+            <a:bodyPr rtlCol="0" anchor="ctr"/>
+            <a:lstStyle/>
+            <a:p>
+              <a:pPr algn="ctr"/>
+              <a:endParaRPr kumimoji="1" lang="ja-JP" altLang="en-US"/>
+            </a:p>
+          </p:txBody>
+        </p:sp>
+        <p:sp>
+          <p:nvSpPr>
+            <p:cNvPr id="20" name="正方形/長方形 19">
+              <a:extLst>
+                <a:ext uri="{FF2B5EF4-FFF2-40B4-BE49-F238E27FC236}">
+                  <a16:creationId xmlns:a16="http://schemas.microsoft.com/office/drawing/2014/main" id="{1D01F16D-78D2-CE45-B00D-3A0F133F73F2}"/>
+                </a:ext>
+              </a:extLst>
+            </p:cNvPr>
+            <p:cNvSpPr/>
+            <p:nvPr/>
+          </p:nvSpPr>
+          <p:spPr>
+            <a:xfrm>
+              <a:off x="7211755" y="4281055"/>
+              <a:ext cx="942106" cy="1884212"/>
+            </a:xfrm>
+            <a:prstGeom prst="rect">
+              <a:avLst/>
+            </a:prstGeom>
+          </p:spPr>
+          <p:style>
+            <a:lnRef idx="2">
+              <a:schemeClr val="accent1">
+                <a:shade val="50000"/>
+              </a:schemeClr>
+            </a:lnRef>
+            <a:fillRef idx="1">
+              <a:schemeClr val="accent1"/>
+            </a:fillRef>
+            <a:effectRef idx="0">
+              <a:schemeClr val="accent1"/>
+            </a:effectRef>
+            <a:fontRef idx="minor">
+              <a:schemeClr val="lt1"/>
+            </a:fontRef>
+          </p:style>
+          <p:txBody>
+            <a:bodyPr rtlCol="0" anchor="ctr"/>
+            <a:lstStyle/>
+            <a:p>
+              <a:pPr algn="ctr"/>
+              <a:endParaRPr kumimoji="1" lang="ja-JP" altLang="en-US"/>
+            </a:p>
+          </p:txBody>
+        </p:sp>
+        <p:sp>
+          <p:nvSpPr>
+            <p:cNvPr id="21" name="正方形/長方形 20">
+              <a:extLst>
+                <a:ext uri="{FF2B5EF4-FFF2-40B4-BE49-F238E27FC236}">
+                  <a16:creationId xmlns:a16="http://schemas.microsoft.com/office/drawing/2014/main" id="{22E78869-39CE-184B-B2F5-02CA83317CF7}"/>
+                </a:ext>
+              </a:extLst>
+            </p:cNvPr>
+            <p:cNvSpPr/>
+            <p:nvPr/>
+          </p:nvSpPr>
+          <p:spPr>
+            <a:xfrm>
+              <a:off x="8333974" y="4281056"/>
+              <a:ext cx="942106" cy="1884212"/>
+            </a:xfrm>
+            <a:prstGeom prst="rect">
+              <a:avLst/>
+            </a:prstGeom>
+          </p:spPr>
+          <p:style>
+            <a:lnRef idx="2">
+              <a:schemeClr val="accent1">
+                <a:shade val="50000"/>
+              </a:schemeClr>
+            </a:lnRef>
+            <a:fillRef idx="1">
+              <a:schemeClr val="accent1"/>
+            </a:fillRef>
+            <a:effectRef idx="0">
+              <a:schemeClr val="accent1"/>
+            </a:effectRef>
+            <a:fontRef idx="minor">
+              <a:schemeClr val="lt1"/>
+            </a:fontRef>
+          </p:style>
+          <p:txBody>
+            <a:bodyPr rtlCol="0" anchor="ctr"/>
+            <a:lstStyle/>
+            <a:p>
+              <a:pPr algn="ctr"/>
+              <a:endParaRPr kumimoji="1" lang="ja-JP" altLang="en-US"/>
+            </a:p>
+          </p:txBody>
+        </p:sp>
+        <p:sp>
+          <p:nvSpPr>
+            <p:cNvPr id="36" name="テキスト ボックス 35">
+              <a:extLst>
+                <a:ext uri="{FF2B5EF4-FFF2-40B4-BE49-F238E27FC236}">
+                  <a16:creationId xmlns:a16="http://schemas.microsoft.com/office/drawing/2014/main" id="{26224488-2070-DE5D-9BA8-F9696E86B043}"/>
+                </a:ext>
+              </a:extLst>
+            </p:cNvPr>
+            <p:cNvSpPr txBox="1"/>
+            <p:nvPr/>
+          </p:nvSpPr>
+          <p:spPr>
+            <a:xfrm>
+              <a:off x="5033352" y="6169260"/>
+              <a:ext cx="821059" cy="261610"/>
+            </a:xfrm>
+            <a:prstGeom prst="rect">
+              <a:avLst/>
+            </a:prstGeom>
+            <a:noFill/>
+          </p:spPr>
+          <p:txBody>
+            <a:bodyPr wrap="none" rtlCol="0">
+              <a:spAutoFit/>
+            </a:bodyPr>
+            <a:lstStyle/>
+            <a:p>
+              <a:pPr>
+                <a:defRPr/>
+              </a:pPr>
+              <a:r>
+                <a:rPr kumimoji="1" lang="ja-JP" altLang="en-US" sz="1100"/>
+                <a:t>Process 1</a:t>
+              </a:r>
+            </a:p>
+          </p:txBody>
+        </p:sp>
+        <p:sp>
+          <p:nvSpPr>
+            <p:cNvPr id="37" name="テキスト ボックス 36">
+              <a:extLst>
+                <a:ext uri="{FF2B5EF4-FFF2-40B4-BE49-F238E27FC236}">
+                  <a16:creationId xmlns:a16="http://schemas.microsoft.com/office/drawing/2014/main" id="{A54150A9-9C79-A118-5AE8-497230EC4DE9}"/>
+                </a:ext>
+              </a:extLst>
+            </p:cNvPr>
+            <p:cNvSpPr txBox="1"/>
+            <p:nvPr/>
+          </p:nvSpPr>
+          <p:spPr>
+            <a:xfrm>
+              <a:off x="6150464" y="6169260"/>
+              <a:ext cx="821059" cy="261610"/>
+            </a:xfrm>
+            <a:prstGeom prst="rect">
+              <a:avLst/>
+            </a:prstGeom>
+            <a:noFill/>
+          </p:spPr>
+          <p:txBody>
+            <a:bodyPr wrap="none" rtlCol="0">
+              <a:spAutoFit/>
+            </a:bodyPr>
+            <a:lstStyle/>
+            <a:p>
+              <a:pPr>
+                <a:defRPr/>
+              </a:pPr>
+              <a:r>
+                <a:rPr kumimoji="1" lang="ja-JP" altLang="en-US" sz="1100"/>
+                <a:t>Process 2</a:t>
+              </a:r>
+            </a:p>
+          </p:txBody>
+        </p:sp>
+        <p:sp>
+          <p:nvSpPr>
+            <p:cNvPr id="38" name="テキスト ボックス 37">
+              <a:extLst>
+                <a:ext uri="{FF2B5EF4-FFF2-40B4-BE49-F238E27FC236}">
+                  <a16:creationId xmlns:a16="http://schemas.microsoft.com/office/drawing/2014/main" id="{771B39DF-2F4E-688C-3A17-0B0AA2430290}"/>
+                </a:ext>
+              </a:extLst>
+            </p:cNvPr>
+            <p:cNvSpPr txBox="1"/>
+            <p:nvPr/>
+          </p:nvSpPr>
+          <p:spPr>
+            <a:xfrm>
+              <a:off x="7250080" y="6169260"/>
+              <a:ext cx="821059" cy="261610"/>
+            </a:xfrm>
+            <a:prstGeom prst="rect">
+              <a:avLst/>
+            </a:prstGeom>
+            <a:noFill/>
+          </p:spPr>
+          <p:txBody>
+            <a:bodyPr wrap="none" rtlCol="0">
+              <a:spAutoFit/>
+            </a:bodyPr>
+            <a:lstStyle/>
+            <a:p>
+              <a:pPr>
+                <a:defRPr/>
+              </a:pPr>
+              <a:r>
+                <a:rPr kumimoji="1" lang="ja-JP" altLang="en-US" sz="1100"/>
+                <a:t>Process 3</a:t>
+              </a:r>
+            </a:p>
+          </p:txBody>
+        </p:sp>
+        <p:sp>
+          <p:nvSpPr>
+            <p:cNvPr id="39" name="テキスト ボックス 38">
+              <a:extLst>
+                <a:ext uri="{FF2B5EF4-FFF2-40B4-BE49-F238E27FC236}">
+                  <a16:creationId xmlns:a16="http://schemas.microsoft.com/office/drawing/2014/main" id="{F7A53976-41EB-5DAC-98C3-D81BEA8380FF}"/>
+                </a:ext>
+              </a:extLst>
+            </p:cNvPr>
+            <p:cNvSpPr txBox="1"/>
+            <p:nvPr/>
+          </p:nvSpPr>
+          <p:spPr>
+            <a:xfrm>
+              <a:off x="8367192" y="6169260"/>
+              <a:ext cx="821059" cy="261610"/>
+            </a:xfrm>
+            <a:prstGeom prst="rect">
+              <a:avLst/>
+            </a:prstGeom>
+            <a:noFill/>
+          </p:spPr>
+          <p:txBody>
+            <a:bodyPr wrap="none" rtlCol="0">
+              <a:spAutoFit/>
+            </a:bodyPr>
+            <a:lstStyle/>
+            <a:p>
+              <a:pPr>
+                <a:defRPr/>
+              </a:pPr>
+              <a:r>
+                <a:rPr kumimoji="1" lang="ja-JP" altLang="en-US" sz="1100"/>
+                <a:t>Process 4</a:t>
+              </a:r>
+            </a:p>
+          </p:txBody>
+        </p:sp>
+      </p:grpSp>
       <p:sp>
         <p:nvSpPr>
-          <p:cNvPr id="16" name="右矢印 15">
+          <p:cNvPr id="44" name="テキスト ボックス 43">
             <a:extLst>
               <a:ext uri="{FF2B5EF4-FFF2-40B4-BE49-F238E27FC236}">
-                <a16:creationId xmlns:a16="http://schemas.microsoft.com/office/drawing/2014/main" id="{37CEC7DB-2DC2-FF43-A250-61F186B4F948}"/>
-              </a:ext>
-            </a:extLst>
-          </p:cNvPr>
-          <p:cNvSpPr/>
-          <p:nvPr/>
-        </p:nvSpPr>
-        <p:spPr>
-          <a:xfrm>
-            <a:off x="1607128" y="4987636"/>
-            <a:ext cx="554181" cy="554182"/>
-          </a:xfrm>
-          <a:prstGeom prst="rightArrow">
-            <a:avLst/>
-          </a:prstGeom>
-          <a:solidFill>
-            <a:srgbClr val="FF0000"/>
-          </a:solidFill>
-        </p:spPr>
-        <p:style>
-          <a:lnRef idx="2">
-            <a:schemeClr val="accent1">
-              <a:shade val="50000"/>
-            </a:schemeClr>
-          </a:lnRef>
-          <a:fillRef idx="1">
-            <a:schemeClr val="accent1"/>
-          </a:fillRef>
-          <a:effectRef idx="0">
-            <a:schemeClr val="accent1"/>
-          </a:effectRef>
-          <a:fontRef idx="minor">
-            <a:schemeClr val="lt1"/>
-          </a:fontRef>
-        </p:style>
-        <p:txBody>
-          <a:bodyPr rtlCol="0" anchor="ctr"/>
-          <a:lstStyle/>
-          <a:p>
-            <a:pPr algn="ctr"/>
-            <a:endParaRPr kumimoji="1" lang="ja-JP" altLang="en-US"/>
-          </a:p>
-        </p:txBody>
-      </p:sp>
-      <p:sp>
-        <p:nvSpPr>
-          <p:cNvPr id="17" name="右矢印 16">
-            <a:extLst>
-              <a:ext uri="{FF2B5EF4-FFF2-40B4-BE49-F238E27FC236}">
-                <a16:creationId xmlns:a16="http://schemas.microsoft.com/office/drawing/2014/main" id="{68B7FB71-3337-5F4B-B07E-C9AE7671D09A}"/>
-              </a:ext>
-            </a:extLst>
-          </p:cNvPr>
-          <p:cNvSpPr/>
-          <p:nvPr/>
-        </p:nvSpPr>
-        <p:spPr>
-          <a:xfrm>
-            <a:off x="4211782" y="4959927"/>
-            <a:ext cx="554181" cy="554182"/>
-          </a:xfrm>
-          <a:prstGeom prst="rightArrow">
-            <a:avLst/>
-          </a:prstGeom>
-          <a:solidFill>
-            <a:srgbClr val="FF0000"/>
-          </a:solidFill>
-        </p:spPr>
-        <p:style>
-          <a:lnRef idx="2">
-            <a:schemeClr val="accent1">
-              <a:shade val="50000"/>
-            </a:schemeClr>
-          </a:lnRef>
-          <a:fillRef idx="1">
-            <a:schemeClr val="accent1"/>
-          </a:fillRef>
-          <a:effectRef idx="0">
-            <a:schemeClr val="accent1"/>
-          </a:effectRef>
-          <a:fontRef idx="minor">
-            <a:schemeClr val="lt1"/>
-          </a:fontRef>
-        </p:style>
-        <p:txBody>
-          <a:bodyPr rtlCol="0" anchor="ctr"/>
-          <a:lstStyle/>
-          <a:p>
-            <a:pPr algn="ctr"/>
-            <a:endParaRPr kumimoji="1" lang="ja-JP" altLang="en-US"/>
-          </a:p>
-        </p:txBody>
-      </p:sp>
-      <p:sp>
-        <p:nvSpPr>
-          <p:cNvPr id="18" name="正方形/長方形 17">
-            <a:extLst>
-              <a:ext uri="{FF2B5EF4-FFF2-40B4-BE49-F238E27FC236}">
-                <a16:creationId xmlns:a16="http://schemas.microsoft.com/office/drawing/2014/main" id="{67FA7351-D9B2-FA4D-814A-CB0A471DD018}"/>
-              </a:ext>
-            </a:extLst>
-          </p:cNvPr>
-          <p:cNvSpPr/>
-          <p:nvPr/>
-        </p:nvSpPr>
-        <p:spPr>
-          <a:xfrm>
-            <a:off x="4925755" y="4281055"/>
-            <a:ext cx="942106" cy="1884212"/>
-          </a:xfrm>
-          <a:prstGeom prst="rect">
-            <a:avLst/>
-          </a:prstGeom>
-        </p:spPr>
-        <p:style>
-          <a:lnRef idx="2">
-            <a:schemeClr val="accent1">
-              <a:shade val="50000"/>
-            </a:schemeClr>
-          </a:lnRef>
-          <a:fillRef idx="1">
-            <a:schemeClr val="accent1"/>
-          </a:fillRef>
-          <a:effectRef idx="0">
-            <a:schemeClr val="accent1"/>
-          </a:effectRef>
-          <a:fontRef idx="minor">
-            <a:schemeClr val="lt1"/>
-          </a:fontRef>
-        </p:style>
-        <p:txBody>
-          <a:bodyPr rtlCol="0" anchor="ctr"/>
-          <a:lstStyle/>
-          <a:p>
-            <a:pPr algn="ctr"/>
-            <a:endParaRPr kumimoji="1" lang="ja-JP" altLang="en-US"/>
-          </a:p>
-        </p:txBody>
-      </p:sp>
-      <p:sp>
-        <p:nvSpPr>
-          <p:cNvPr id="19" name="正方形/長方形 18">
-            <a:extLst>
-              <a:ext uri="{FF2B5EF4-FFF2-40B4-BE49-F238E27FC236}">
-                <a16:creationId xmlns:a16="http://schemas.microsoft.com/office/drawing/2014/main" id="{7328A581-972C-4544-8BF0-8C61B4E7F64B}"/>
-              </a:ext>
-            </a:extLst>
-          </p:cNvPr>
-          <p:cNvSpPr/>
-          <p:nvPr/>
-        </p:nvSpPr>
-        <p:spPr>
-          <a:xfrm>
-            <a:off x="6089537" y="4281055"/>
-            <a:ext cx="942106" cy="1884212"/>
-          </a:xfrm>
-          <a:prstGeom prst="rect">
-            <a:avLst/>
-          </a:prstGeom>
-        </p:spPr>
-        <p:style>
-          <a:lnRef idx="2">
-            <a:schemeClr val="accent1">
-              <a:shade val="50000"/>
-            </a:schemeClr>
-          </a:lnRef>
-          <a:fillRef idx="1">
-            <a:schemeClr val="accent1"/>
-          </a:fillRef>
-          <a:effectRef idx="0">
-            <a:schemeClr val="accent1"/>
-          </a:effectRef>
-          <a:fontRef idx="minor">
-            <a:schemeClr val="lt1"/>
-          </a:fontRef>
-        </p:style>
-        <p:txBody>
-          <a:bodyPr rtlCol="0" anchor="ctr"/>
-          <a:lstStyle/>
-          <a:p>
-            <a:pPr algn="ctr"/>
-            <a:endParaRPr kumimoji="1" lang="ja-JP" altLang="en-US"/>
-          </a:p>
-        </p:txBody>
-      </p:sp>
-      <p:sp>
-        <p:nvSpPr>
-          <p:cNvPr id="20" name="正方形/長方形 19">
-            <a:extLst>
-              <a:ext uri="{FF2B5EF4-FFF2-40B4-BE49-F238E27FC236}">
-                <a16:creationId xmlns:a16="http://schemas.microsoft.com/office/drawing/2014/main" id="{1D01F16D-78D2-CE45-B00D-3A0F133F73F2}"/>
-              </a:ext>
-            </a:extLst>
-          </p:cNvPr>
-          <p:cNvSpPr/>
-          <p:nvPr/>
-        </p:nvSpPr>
-        <p:spPr>
-          <a:xfrm>
-            <a:off x="7211755" y="4281055"/>
-            <a:ext cx="942106" cy="1884212"/>
-          </a:xfrm>
-          <a:prstGeom prst="rect">
-            <a:avLst/>
-          </a:prstGeom>
-        </p:spPr>
-        <p:style>
-          <a:lnRef idx="2">
-            <a:schemeClr val="accent1">
-              <a:shade val="50000"/>
-            </a:schemeClr>
-          </a:lnRef>
-          <a:fillRef idx="1">
-            <a:schemeClr val="accent1"/>
-          </a:fillRef>
-          <a:effectRef idx="0">
-            <a:schemeClr val="accent1"/>
-          </a:effectRef>
-          <a:fontRef idx="minor">
-            <a:schemeClr val="lt1"/>
-          </a:fontRef>
-        </p:style>
-        <p:txBody>
-          <a:bodyPr rtlCol="0" anchor="ctr"/>
-          <a:lstStyle/>
-          <a:p>
-            <a:pPr algn="ctr"/>
-            <a:endParaRPr kumimoji="1" lang="ja-JP" altLang="en-US"/>
-          </a:p>
-        </p:txBody>
-      </p:sp>
-      <p:sp>
-        <p:nvSpPr>
-          <p:cNvPr id="21" name="正方形/長方形 20">
-            <a:extLst>
-              <a:ext uri="{FF2B5EF4-FFF2-40B4-BE49-F238E27FC236}">
-                <a16:creationId xmlns:a16="http://schemas.microsoft.com/office/drawing/2014/main" id="{22E78869-39CE-184B-B2F5-02CA83317CF7}"/>
-              </a:ext>
-            </a:extLst>
-          </p:cNvPr>
-          <p:cNvSpPr/>
-          <p:nvPr/>
-        </p:nvSpPr>
-        <p:spPr>
-          <a:xfrm>
-            <a:off x="8333974" y="4281056"/>
-            <a:ext cx="942106" cy="1884212"/>
-          </a:xfrm>
-          <a:prstGeom prst="rect">
-            <a:avLst/>
-          </a:prstGeom>
-        </p:spPr>
-        <p:style>
-          <a:lnRef idx="2">
-            <a:schemeClr val="accent1">
-              <a:shade val="50000"/>
-            </a:schemeClr>
-          </a:lnRef>
-          <a:fillRef idx="1">
-            <a:schemeClr val="accent1"/>
-          </a:fillRef>
-          <a:effectRef idx="0">
-            <a:schemeClr val="accent1"/>
-          </a:effectRef>
-          <a:fontRef idx="minor">
-            <a:schemeClr val="lt1"/>
-          </a:fontRef>
-        </p:style>
-        <p:txBody>
-          <a:bodyPr rtlCol="0" anchor="ctr"/>
-          <a:lstStyle/>
-          <a:p>
-            <a:pPr algn="ctr"/>
-            <a:endParaRPr kumimoji="1" lang="ja-JP" altLang="en-US"/>
-          </a:p>
-        </p:txBody>
-      </p:sp>
-      <p:sp>
-        <p:nvSpPr>
-          <p:cNvPr id="24" name="テキスト ボックス 23">
-            <a:extLst>
-              <a:ext uri="{FF2B5EF4-FFF2-40B4-BE49-F238E27FC236}">
-                <a16:creationId xmlns:a16="http://schemas.microsoft.com/office/drawing/2014/main" id="{142E7465-C6D6-4C46-8B46-6ADB5ABC80A6}"/>
+                <a16:creationId xmlns:a16="http://schemas.microsoft.com/office/drawing/2014/main" id="{004E5839-1A4E-D584-C179-9166574F497E}"/>
               </a:ext>
             </a:extLst>
           </p:cNvPr>
@@ -3152,8 +3352,8 @@
         </p:nvSpPr>
         <p:spPr>
           <a:xfrm>
-            <a:off x="4987636" y="2978727"/>
-            <a:ext cx="821059" cy="261610"/>
+            <a:off x="1600246" y="1043768"/>
+            <a:ext cx="2279888" cy="369332"/>
           </a:xfrm>
           <a:prstGeom prst="rect">
             <a:avLst/>
@@ -3161,28 +3361,24 @@
           <a:noFill/>
         </p:spPr>
         <p:txBody>
-          <a:bodyPr wrap="none" rtlCol="0">
+          <a:bodyPr wrap="square">
             <a:spAutoFit/>
           </a:bodyPr>
           <a:lstStyle/>
           <a:p>
-            <a:pPr>
-              <a:defRPr/>
-            </a:pPr>
             <a:r>
-              <a:rPr kumimoji="1" lang="ja-JP" altLang="en-US" sz="1100"/>
-              <a:t>Process 1</a:t>
+              <a:rPr lang="ja-JP" altLang="en-US"/>
+              <a:t>sequential computing</a:t>
             </a:r>
-            <a:endParaRPr kumimoji="1" lang="ja-JP" altLang="en-US" sz="1100"/>
           </a:p>
         </p:txBody>
       </p:sp>
       <p:sp>
         <p:nvSpPr>
-          <p:cNvPr id="25" name="テキスト ボックス 24">
+          <p:cNvPr id="45" name="テキスト ボックス 44">
             <a:extLst>
               <a:ext uri="{FF2B5EF4-FFF2-40B4-BE49-F238E27FC236}">
-                <a16:creationId xmlns:a16="http://schemas.microsoft.com/office/drawing/2014/main" id="{C87403A7-5F83-8E4F-AC1F-7D2C3C38FF31}"/>
+                <a16:creationId xmlns:a16="http://schemas.microsoft.com/office/drawing/2014/main" id="{68D3DB7A-D57E-6B75-30D9-F862139AC1D3}"/>
               </a:ext>
             </a:extLst>
           </p:cNvPr>
@@ -3191,8 +3387,8 @@
         </p:nvSpPr>
         <p:spPr>
           <a:xfrm>
-            <a:off x="6165272" y="2964873"/>
-            <a:ext cx="821059" cy="261610"/>
+            <a:off x="4885924" y="1043768"/>
+            <a:ext cx="2279888" cy="369332"/>
           </a:xfrm>
           <a:prstGeom prst="rect">
             <a:avLst/>
@@ -3200,28 +3396,28 @@
           <a:noFill/>
         </p:spPr>
         <p:txBody>
-          <a:bodyPr wrap="none" rtlCol="0">
+          <a:bodyPr wrap="square">
             <a:spAutoFit/>
           </a:bodyPr>
           <a:lstStyle/>
           <a:p>
-            <a:pPr>
-              <a:defRPr/>
-            </a:pPr>
             <a:r>
-              <a:rPr kumimoji="1" lang="ja-JP" altLang="en-US" sz="1100"/>
-              <a:t>Process 2</a:t>
+              <a:rPr lang="en-US" altLang="ja-JP" dirty="0"/>
+              <a:t>parallel</a:t>
             </a:r>
-            <a:endParaRPr kumimoji="1" lang="ja-JP" altLang="en-US" sz="1100"/>
+            <a:r>
+              <a:rPr lang="ja-JP" altLang="en-US"/>
+              <a:t> computing</a:t>
+            </a:r>
           </a:p>
         </p:txBody>
       </p:sp>
       <p:sp>
         <p:nvSpPr>
-          <p:cNvPr id="26" name="テキスト ボックス 25">
+          <p:cNvPr id="46" name="テキスト ボックス 45">
             <a:extLst>
               <a:ext uri="{FF2B5EF4-FFF2-40B4-BE49-F238E27FC236}">
-                <a16:creationId xmlns:a16="http://schemas.microsoft.com/office/drawing/2014/main" id="{1FF5385A-F508-424C-B939-6F70C723E6BC}"/>
+                <a16:creationId xmlns:a16="http://schemas.microsoft.com/office/drawing/2014/main" id="{DD4EC4CE-BAC6-91EF-060D-9F0D00C38155}"/>
               </a:ext>
             </a:extLst>
           </p:cNvPr>
@@ -3230,8 +3426,8 @@
         </p:nvSpPr>
         <p:spPr>
           <a:xfrm>
-            <a:off x="7204363" y="2978727"/>
-            <a:ext cx="821059" cy="261610"/>
+            <a:off x="1670351" y="4182785"/>
+            <a:ext cx="2279888" cy="369332"/>
           </a:xfrm>
           <a:prstGeom prst="rect">
             <a:avLst/>
@@ -3239,28 +3435,24 @@
           <a:noFill/>
         </p:spPr>
         <p:txBody>
-          <a:bodyPr wrap="none" rtlCol="0">
+          <a:bodyPr wrap="square">
             <a:spAutoFit/>
           </a:bodyPr>
           <a:lstStyle/>
           <a:p>
-            <a:pPr>
-              <a:defRPr/>
-            </a:pPr>
             <a:r>
-              <a:rPr kumimoji="1" lang="ja-JP" altLang="en-US" sz="1100"/>
-              <a:t>Process 3</a:t>
+              <a:rPr lang="ja-JP" altLang="en-US"/>
+              <a:t>sequential computing</a:t>
             </a:r>
-            <a:endParaRPr kumimoji="1" lang="ja-JP" altLang="en-US" sz="1100"/>
           </a:p>
         </p:txBody>
       </p:sp>
       <p:sp>
         <p:nvSpPr>
-          <p:cNvPr id="27" name="テキスト ボックス 26">
+          <p:cNvPr id="47" name="テキスト ボックス 46">
             <a:extLst>
               <a:ext uri="{FF2B5EF4-FFF2-40B4-BE49-F238E27FC236}">
-                <a16:creationId xmlns:a16="http://schemas.microsoft.com/office/drawing/2014/main" id="{502DDAC4-61D5-F04F-B806-F96E4370B8B2}"/>
+                <a16:creationId xmlns:a16="http://schemas.microsoft.com/office/drawing/2014/main" id="{295246B7-F912-4B26-489A-E133524175C0}"/>
               </a:ext>
             </a:extLst>
           </p:cNvPr>
@@ -3269,8 +3461,8 @@
         </p:nvSpPr>
         <p:spPr>
           <a:xfrm>
-            <a:off x="8381999" y="2964873"/>
-            <a:ext cx="821059" cy="261610"/>
+            <a:off x="4956029" y="4182785"/>
+            <a:ext cx="2279888" cy="369332"/>
           </a:xfrm>
           <a:prstGeom prst="rect">
             <a:avLst/>
@@ -3278,175 +3470,19 @@
           <a:noFill/>
         </p:spPr>
         <p:txBody>
-          <a:bodyPr wrap="none" rtlCol="0">
+          <a:bodyPr wrap="square">
             <a:spAutoFit/>
           </a:bodyPr>
           <a:lstStyle/>
           <a:p>
-            <a:pPr>
-              <a:defRPr/>
-            </a:pPr>
             <a:r>
-              <a:rPr kumimoji="1" lang="ja-JP" altLang="en-US" sz="1100"/>
-              <a:t>Process 4</a:t>
+              <a:rPr lang="en-US" altLang="ja-JP" dirty="0"/>
+              <a:t>parallel</a:t>
             </a:r>
-            <a:endParaRPr kumimoji="1" lang="ja-JP" altLang="en-US" sz="1100"/>
-          </a:p>
-        </p:txBody>
-      </p:sp>
-      <p:sp>
-        <p:nvSpPr>
-          <p:cNvPr id="28" name="テキスト ボックス 27">
-            <a:extLst>
-              <a:ext uri="{FF2B5EF4-FFF2-40B4-BE49-F238E27FC236}">
-                <a16:creationId xmlns:a16="http://schemas.microsoft.com/office/drawing/2014/main" id="{8F906CC6-2BA1-D743-8442-B4524D54FC6B}"/>
-              </a:ext>
-            </a:extLst>
-          </p:cNvPr>
-          <p:cNvSpPr txBox="1"/>
-          <p:nvPr/>
-        </p:nvSpPr>
-        <p:spPr>
-          <a:xfrm>
-            <a:off x="5001491" y="6179127"/>
-            <a:ext cx="821059" cy="261610"/>
-          </a:xfrm>
-          <a:prstGeom prst="rect">
-            <a:avLst/>
-          </a:prstGeom>
-          <a:noFill/>
-        </p:spPr>
-        <p:txBody>
-          <a:bodyPr wrap="none" rtlCol="0">
-            <a:spAutoFit/>
-          </a:bodyPr>
-          <a:lstStyle/>
-          <a:p>
-            <a:pPr>
-              <a:defRPr/>
-            </a:pPr>
             <a:r>
-              <a:rPr kumimoji="1" lang="ja-JP" altLang="en-US" sz="1100"/>
-              <a:t>Process 1</a:t>
+              <a:rPr lang="ja-JP" altLang="en-US"/>
+              <a:t> computing</a:t>
             </a:r>
-            <a:endParaRPr kumimoji="1" lang="ja-JP" altLang="en-US" sz="1100"/>
-          </a:p>
-        </p:txBody>
-      </p:sp>
-      <p:sp>
-        <p:nvSpPr>
-          <p:cNvPr id="29" name="テキスト ボックス 28">
-            <a:extLst>
-              <a:ext uri="{FF2B5EF4-FFF2-40B4-BE49-F238E27FC236}">
-                <a16:creationId xmlns:a16="http://schemas.microsoft.com/office/drawing/2014/main" id="{2EE6D1B7-16B6-EF48-949F-51085EE6EABA}"/>
-              </a:ext>
-            </a:extLst>
-          </p:cNvPr>
-          <p:cNvSpPr txBox="1"/>
-          <p:nvPr/>
-        </p:nvSpPr>
-        <p:spPr>
-          <a:xfrm>
-            <a:off x="6179127" y="6165273"/>
-            <a:ext cx="821059" cy="261610"/>
-          </a:xfrm>
-          <a:prstGeom prst="rect">
-            <a:avLst/>
-          </a:prstGeom>
-          <a:noFill/>
-        </p:spPr>
-        <p:txBody>
-          <a:bodyPr wrap="none" rtlCol="0">
-            <a:spAutoFit/>
-          </a:bodyPr>
-          <a:lstStyle/>
-          <a:p>
-            <a:pPr>
-              <a:defRPr/>
-            </a:pPr>
-            <a:r>
-              <a:rPr kumimoji="1" lang="ja-JP" altLang="en-US" sz="1100"/>
-              <a:t>Process 2</a:t>
-            </a:r>
-            <a:endParaRPr kumimoji="1" lang="ja-JP" altLang="en-US" sz="1100"/>
-          </a:p>
-        </p:txBody>
-      </p:sp>
-      <p:sp>
-        <p:nvSpPr>
-          <p:cNvPr id="30" name="テキスト ボックス 29">
-            <a:extLst>
-              <a:ext uri="{FF2B5EF4-FFF2-40B4-BE49-F238E27FC236}">
-                <a16:creationId xmlns:a16="http://schemas.microsoft.com/office/drawing/2014/main" id="{BE2C495E-E17E-F840-A042-03720D3ADB8F}"/>
-              </a:ext>
-            </a:extLst>
-          </p:cNvPr>
-          <p:cNvSpPr txBox="1"/>
-          <p:nvPr/>
-        </p:nvSpPr>
-        <p:spPr>
-          <a:xfrm>
-            <a:off x="7218218" y="6179127"/>
-            <a:ext cx="821059" cy="261610"/>
-          </a:xfrm>
-          <a:prstGeom prst="rect">
-            <a:avLst/>
-          </a:prstGeom>
-          <a:noFill/>
-        </p:spPr>
-        <p:txBody>
-          <a:bodyPr wrap="none" rtlCol="0">
-            <a:spAutoFit/>
-          </a:bodyPr>
-          <a:lstStyle/>
-          <a:p>
-            <a:pPr>
-              <a:defRPr/>
-            </a:pPr>
-            <a:r>
-              <a:rPr kumimoji="1" lang="ja-JP" altLang="en-US" sz="1100"/>
-              <a:t>Process 3</a:t>
-            </a:r>
-            <a:endParaRPr kumimoji="1" lang="ja-JP" altLang="en-US" sz="1100"/>
-          </a:p>
-        </p:txBody>
-      </p:sp>
-      <p:sp>
-        <p:nvSpPr>
-          <p:cNvPr id="31" name="テキスト ボックス 30">
-            <a:extLst>
-              <a:ext uri="{FF2B5EF4-FFF2-40B4-BE49-F238E27FC236}">
-                <a16:creationId xmlns:a16="http://schemas.microsoft.com/office/drawing/2014/main" id="{F0AB668F-7572-6D43-8245-4EB121EC61AF}"/>
-              </a:ext>
-            </a:extLst>
-          </p:cNvPr>
-          <p:cNvSpPr txBox="1"/>
-          <p:nvPr/>
-        </p:nvSpPr>
-        <p:spPr>
-          <a:xfrm>
-            <a:off x="8395854" y="6165273"/>
-            <a:ext cx="821059" cy="261610"/>
-          </a:xfrm>
-          <a:prstGeom prst="rect">
-            <a:avLst/>
-          </a:prstGeom>
-          <a:noFill/>
-        </p:spPr>
-        <p:txBody>
-          <a:bodyPr wrap="none" rtlCol="0">
-            <a:spAutoFit/>
-          </a:bodyPr>
-          <a:lstStyle/>
-          <a:p>
-            <a:pPr>
-              <a:defRPr/>
-            </a:pPr>
-            <a:r>
-              <a:rPr kumimoji="1" lang="ja-JP" altLang="en-US" sz="1100"/>
-              <a:t>Process 4</a:t>
-            </a:r>
-            <a:endParaRPr kumimoji="1" lang="ja-JP" altLang="en-US" sz="1100"/>
           </a:p>
         </p:txBody>
       </p:sp>
